--- a/Fisher-Yates発表用.pptx
+++ b/Fisher-Yates発表用.pptx
@@ -6,6 +6,11 @@
   </p:sldMasterIdLst>
   <p:sldIdLst>
     <p:sldId id="256" r:id="rId2"/>
+    <p:sldId id="257" r:id="rId3"/>
+    <p:sldId id="258" r:id="rId4"/>
+    <p:sldId id="259" r:id="rId5"/>
+    <p:sldId id="260" r:id="rId6"/>
+    <p:sldId id="261" r:id="rId7"/>
   </p:sldIdLst>
   <p:sldSz cx="12192000" cy="6858000"/>
   <p:notesSz cx="6858000" cy="9144000"/>
@@ -104,6 +109,11 @@
       </a:defRPr>
     </a:lvl9pPr>
   </p:defaultTextStyle>
+  <p:extLst>
+    <p:ext uri="{EFAFB233-063F-42B5-8137-9DF3F51BA10A}">
+      <p15:sldGuideLst xmlns:p15="http://schemas.microsoft.com/office/powerpoint/2012/main"/>
+    </p:ext>
+  </p:extLst>
 </p:presentation>
 </file>
 
@@ -254,7 +264,7 @@
           <a:p>
             <a:fld id="{8EA3E408-0FCD-471E-8DC4-44F3A6A02DAE}" type="datetimeFigureOut">
               <a:rPr kumimoji="1" lang="ja-JP" altLang="en-US" smtClean="0"/>
-              <a:t>2025/7/17</a:t>
+              <a:t>2025/7/22</a:t>
             </a:fld>
             <a:endParaRPr kumimoji="1" lang="ja-JP" altLang="en-US"/>
           </a:p>
@@ -484,7 +494,7 @@
           <a:p>
             <a:fld id="{8EA3E408-0FCD-471E-8DC4-44F3A6A02DAE}" type="datetimeFigureOut">
               <a:rPr kumimoji="1" lang="ja-JP" altLang="en-US" smtClean="0"/>
-              <a:t>2025/7/17</a:t>
+              <a:t>2025/7/22</a:t>
             </a:fld>
             <a:endParaRPr kumimoji="1" lang="ja-JP" altLang="en-US"/>
           </a:p>
@@ -724,7 +734,7 @@
           <a:p>
             <a:fld id="{8EA3E408-0FCD-471E-8DC4-44F3A6A02DAE}" type="datetimeFigureOut">
               <a:rPr kumimoji="1" lang="ja-JP" altLang="en-US" smtClean="0"/>
-              <a:t>2025/7/17</a:t>
+              <a:t>2025/7/22</a:t>
             </a:fld>
             <a:endParaRPr kumimoji="1" lang="ja-JP" altLang="en-US"/>
           </a:p>
@@ -830,7 +840,12 @@
             <p:ph type="title"/>
           </p:nvPr>
         </p:nvSpPr>
-        <p:spPr/>
+        <p:spPr>
+          <a:xfrm>
+            <a:off x="1355034" y="250031"/>
+            <a:ext cx="10515600" cy="1325563"/>
+          </a:xfrm>
+        </p:spPr>
         <p:txBody>
           <a:bodyPr/>
           <a:lstStyle/>
@@ -858,7 +873,12 @@
             <p:ph idx="1"/>
           </p:nvPr>
         </p:nvSpPr>
-        <p:spPr/>
+        <p:spPr>
+          <a:xfrm>
+            <a:off x="937592" y="1790303"/>
+            <a:ext cx="10515600" cy="4351338"/>
+          </a:xfrm>
+        </p:spPr>
         <p:txBody>
           <a:bodyPr/>
           <a:lstStyle/>
@@ -954,7 +974,7 @@
           <a:p>
             <a:fld id="{8EA3E408-0FCD-471E-8DC4-44F3A6A02DAE}" type="datetimeFigureOut">
               <a:rPr kumimoji="1" lang="ja-JP" altLang="en-US" smtClean="0"/>
-              <a:t>2025/7/17</a:t>
+              <a:t>2025/7/22</a:t>
             </a:fld>
             <a:endParaRPr kumimoji="1" lang="ja-JP" altLang="en-US"/>
           </a:p>
@@ -1229,7 +1249,7 @@
           <a:p>
             <a:fld id="{8EA3E408-0FCD-471E-8DC4-44F3A6A02DAE}" type="datetimeFigureOut">
               <a:rPr kumimoji="1" lang="ja-JP" altLang="en-US" smtClean="0"/>
-              <a:t>2025/7/17</a:t>
+              <a:t>2025/7/22</a:t>
             </a:fld>
             <a:endParaRPr kumimoji="1" lang="ja-JP" altLang="en-US"/>
           </a:p>
@@ -1558,7 +1578,7 @@
           <a:p>
             <a:fld id="{8EA3E408-0FCD-471E-8DC4-44F3A6A02DAE}" type="datetimeFigureOut">
               <a:rPr kumimoji="1" lang="ja-JP" altLang="en-US" smtClean="0"/>
-              <a:t>2025/7/17</a:t>
+              <a:t>2025/7/22</a:t>
             </a:fld>
             <a:endParaRPr kumimoji="1" lang="ja-JP" altLang="en-US"/>
           </a:p>
@@ -2034,7 +2054,7 @@
           <a:p>
             <a:fld id="{8EA3E408-0FCD-471E-8DC4-44F3A6A02DAE}" type="datetimeFigureOut">
               <a:rPr kumimoji="1" lang="ja-JP" altLang="en-US" smtClean="0"/>
-              <a:t>2025/7/17</a:t>
+              <a:t>2025/7/22</a:t>
             </a:fld>
             <a:endParaRPr kumimoji="1" lang="ja-JP" altLang="en-US"/>
           </a:p>
@@ -2175,7 +2195,7 @@
           <a:p>
             <a:fld id="{8EA3E408-0FCD-471E-8DC4-44F3A6A02DAE}" type="datetimeFigureOut">
               <a:rPr kumimoji="1" lang="ja-JP" altLang="en-US" smtClean="0"/>
-              <a:t>2025/7/17</a:t>
+              <a:t>2025/7/22</a:t>
             </a:fld>
             <a:endParaRPr kumimoji="1" lang="ja-JP" altLang="en-US"/>
           </a:p>
@@ -2288,7 +2308,7 @@
           <a:p>
             <a:fld id="{8EA3E408-0FCD-471E-8DC4-44F3A6A02DAE}" type="datetimeFigureOut">
               <a:rPr kumimoji="1" lang="ja-JP" altLang="en-US" smtClean="0"/>
-              <a:t>2025/7/17</a:t>
+              <a:t>2025/7/22</a:t>
             </a:fld>
             <a:endParaRPr kumimoji="1" lang="ja-JP" altLang="en-US"/>
           </a:p>
@@ -2631,7 +2651,7 @@
           <a:p>
             <a:fld id="{8EA3E408-0FCD-471E-8DC4-44F3A6A02DAE}" type="datetimeFigureOut">
               <a:rPr kumimoji="1" lang="ja-JP" altLang="en-US" smtClean="0"/>
-              <a:t>2025/7/17</a:t>
+              <a:t>2025/7/22</a:t>
             </a:fld>
             <a:endParaRPr kumimoji="1" lang="ja-JP" altLang="en-US"/>
           </a:p>
@@ -2919,7 +2939,7 @@
           <a:p>
             <a:fld id="{8EA3E408-0FCD-471E-8DC4-44F3A6A02DAE}" type="datetimeFigureOut">
               <a:rPr kumimoji="1" lang="ja-JP" altLang="en-US" smtClean="0"/>
-              <a:t>2025/7/17</a:t>
+              <a:t>2025/7/22</a:t>
             </a:fld>
             <a:endParaRPr kumimoji="1" lang="ja-JP" altLang="en-US"/>
           </a:p>
@@ -3228,7 +3248,7 @@
           <a:p>
             <a:fld id="{8EA3E408-0FCD-471E-8DC4-44F3A6A02DAE}" type="datetimeFigureOut">
               <a:rPr kumimoji="1" lang="ja-JP" altLang="en-US" smtClean="0"/>
-              <a:t>2025/7/17</a:t>
+              <a:t>2025/7/22</a:t>
             </a:fld>
             <a:endParaRPr kumimoji="1" lang="ja-JP" altLang="en-US"/>
           </a:p>
@@ -3733,6 +3753,2531 @@
     <p:extLst>
       <p:ext uri="{BB962C8B-B14F-4D97-AF65-F5344CB8AC3E}">
         <p14:creationId xmlns:p14="http://schemas.microsoft.com/office/powerpoint/2010/main" val="1580440300"/>
+      </p:ext>
+    </p:extLst>
+  </p:cSld>
+  <p:clrMapOvr>
+    <a:masterClrMapping/>
+  </p:clrMapOvr>
+</p:sld>
+</file>
+
+<file path=ppt/slides/slide2.xml><?xml version="1.0" encoding="utf-8"?>
+<p:sld xmlns:a="http://schemas.openxmlformats.org/drawingml/2006/main" xmlns:r="http://schemas.openxmlformats.org/officeDocument/2006/relationships" xmlns:p="http://schemas.openxmlformats.org/presentationml/2006/main">
+  <p:cSld>
+    <p:spTree>
+      <p:nvGrpSpPr>
+        <p:cNvPr id="1" name=""/>
+        <p:cNvGrpSpPr/>
+        <p:nvPr/>
+      </p:nvGrpSpPr>
+      <p:grpSpPr>
+        <a:xfrm>
+          <a:off x="0" y="0"/>
+          <a:ext cx="0" cy="0"/>
+          <a:chOff x="0" y="0"/>
+          <a:chExt cx="0" cy="0"/>
+        </a:xfrm>
+      </p:grpSpPr>
+      <p:sp>
+        <p:nvSpPr>
+          <p:cNvPr id="2" name="タイトル 1">
+            <a:extLst>
+              <a:ext uri="{FF2B5EF4-FFF2-40B4-BE49-F238E27FC236}">
+                <a16:creationId xmlns:a16="http://schemas.microsoft.com/office/drawing/2014/main" id="{FC4A0195-F066-E109-9149-0FCF620C3D63}"/>
+              </a:ext>
+            </a:extLst>
+          </p:cNvPr>
+          <p:cNvSpPr>
+            <a:spLocks noGrp="1"/>
+          </p:cNvSpPr>
+          <p:nvPr>
+            <p:ph type="title"/>
+          </p:nvPr>
+        </p:nvSpPr>
+        <p:spPr>
+          <a:xfrm>
+            <a:off x="1376333" y="250031"/>
+            <a:ext cx="10515600" cy="1325563"/>
+          </a:xfrm>
+        </p:spPr>
+        <p:txBody>
+          <a:bodyPr/>
+          <a:lstStyle/>
+          <a:p>
+            <a:r>
+              <a:rPr kumimoji="1" lang="en-US" altLang="ja-JP" dirty="0"/>
+              <a:t>Fisher-Yates</a:t>
+            </a:r>
+            <a:r>
+              <a:rPr kumimoji="1" lang="ja-JP" altLang="en-US" dirty="0"/>
+              <a:t>のシャッフルとは</a:t>
+            </a:r>
+          </a:p>
+        </p:txBody>
+      </p:sp>
+      <p:sp>
+        <p:nvSpPr>
+          <p:cNvPr id="3" name="コンテンツ プレースホルダー 2">
+            <a:extLst>
+              <a:ext uri="{FF2B5EF4-FFF2-40B4-BE49-F238E27FC236}">
+                <a16:creationId xmlns:a16="http://schemas.microsoft.com/office/drawing/2014/main" id="{0E81AEC3-EF9D-F1B8-0134-0F06B4D235AF}"/>
+              </a:ext>
+            </a:extLst>
+          </p:cNvPr>
+          <p:cNvSpPr>
+            <a:spLocks noGrp="1"/>
+          </p:cNvSpPr>
+          <p:nvPr>
+            <p:ph idx="1"/>
+          </p:nvPr>
+        </p:nvSpPr>
+        <p:spPr>
+          <a:xfrm>
+            <a:off x="1001485" y="1825625"/>
+            <a:ext cx="10515600" cy="4351338"/>
+          </a:xfrm>
+        </p:spPr>
+        <p:txBody>
+          <a:bodyPr/>
+          <a:lstStyle/>
+          <a:p>
+            <a:r>
+              <a:rPr kumimoji="1" lang="ja-JP" altLang="en-US" dirty="0"/>
+              <a:t>ロナウド・フィッシャー、フランク・イェーツ</a:t>
+            </a:r>
+            <a:endParaRPr kumimoji="1" lang="en-US" altLang="ja-JP" dirty="0"/>
+          </a:p>
+          <a:p>
+            <a:pPr marL="0" indent="0">
+              <a:buNone/>
+            </a:pPr>
+            <a:r>
+              <a:rPr lang="ja-JP" altLang="en-US" dirty="0"/>
+              <a:t>　によって考案されたシャッフルアルゴリズム</a:t>
+            </a:r>
+          </a:p>
+          <a:p>
+            <a:pPr marL="0" indent="0">
+              <a:buNone/>
+            </a:pPr>
+            <a:endParaRPr lang="en-US" altLang="ja-JP" dirty="0"/>
+          </a:p>
+          <a:p>
+            <a:r>
+              <a:rPr kumimoji="1" lang="en-US" altLang="ja-JP" dirty="0"/>
+              <a:t>in-place</a:t>
+            </a:r>
+            <a:r>
+              <a:rPr kumimoji="1" lang="ja-JP" altLang="en-US" dirty="0"/>
+              <a:t>なアルゴリズム</a:t>
+            </a:r>
+            <a:endParaRPr kumimoji="1" lang="en-US" altLang="ja-JP" dirty="0"/>
+          </a:p>
+          <a:p>
+            <a:endParaRPr lang="en-US" altLang="ja-JP" dirty="0"/>
+          </a:p>
+          <a:p>
+            <a:r>
+              <a:rPr kumimoji="1" lang="en-US" altLang="ja-JP" dirty="0"/>
+              <a:t>O(N)</a:t>
+            </a:r>
+            <a:r>
+              <a:rPr kumimoji="1" lang="ja-JP" altLang="en-US" dirty="0"/>
+              <a:t>で動作する</a:t>
+            </a:r>
+            <a:endParaRPr kumimoji="1" lang="en-US" altLang="ja-JP" dirty="0"/>
+          </a:p>
+        </p:txBody>
+      </p:sp>
+    </p:spTree>
+    <p:extLst>
+      <p:ext uri="{BB962C8B-B14F-4D97-AF65-F5344CB8AC3E}">
+        <p14:creationId xmlns:p14="http://schemas.microsoft.com/office/powerpoint/2010/main" val="3643413804"/>
+      </p:ext>
+    </p:extLst>
+  </p:cSld>
+  <p:clrMapOvr>
+    <a:masterClrMapping/>
+  </p:clrMapOvr>
+</p:sld>
+</file>
+
+<file path=ppt/slides/slide3.xml><?xml version="1.0" encoding="utf-8"?>
+<p:sld xmlns:a="http://schemas.openxmlformats.org/drawingml/2006/main" xmlns:r="http://schemas.openxmlformats.org/officeDocument/2006/relationships" xmlns:p="http://schemas.openxmlformats.org/presentationml/2006/main">
+  <p:cSld>
+    <p:spTree>
+      <p:nvGrpSpPr>
+        <p:cNvPr id="1" name=""/>
+        <p:cNvGrpSpPr/>
+        <p:nvPr/>
+      </p:nvGrpSpPr>
+      <p:grpSpPr>
+        <a:xfrm>
+          <a:off x="0" y="0"/>
+          <a:ext cx="0" cy="0"/>
+          <a:chOff x="0" y="0"/>
+          <a:chExt cx="0" cy="0"/>
+        </a:xfrm>
+      </p:grpSpPr>
+      <p:sp>
+        <p:nvSpPr>
+          <p:cNvPr id="2" name="タイトル 1">
+            <a:extLst>
+              <a:ext uri="{FF2B5EF4-FFF2-40B4-BE49-F238E27FC236}">
+                <a16:creationId xmlns:a16="http://schemas.microsoft.com/office/drawing/2014/main" id="{015712A8-376E-41A4-7765-62DDF673BAA3}"/>
+              </a:ext>
+            </a:extLst>
+          </p:cNvPr>
+          <p:cNvSpPr>
+            <a:spLocks noGrp="1"/>
+          </p:cNvSpPr>
+          <p:nvPr>
+            <p:ph type="title"/>
+          </p:nvPr>
+        </p:nvSpPr>
+        <p:spPr>
+          <a:xfrm>
+            <a:off x="1354561" y="206488"/>
+            <a:ext cx="10515600" cy="1325563"/>
+          </a:xfrm>
+        </p:spPr>
+        <p:txBody>
+          <a:bodyPr/>
+          <a:lstStyle/>
+          <a:p>
+            <a:r>
+              <a:rPr kumimoji="1" lang="ja-JP" altLang="en-US" dirty="0"/>
+              <a:t>動作</a:t>
+            </a:r>
+          </a:p>
+        </p:txBody>
+      </p:sp>
+      <p:sp>
+        <p:nvSpPr>
+          <p:cNvPr id="3" name="コンテンツ プレースホルダー 2">
+            <a:extLst>
+              <a:ext uri="{FF2B5EF4-FFF2-40B4-BE49-F238E27FC236}">
+                <a16:creationId xmlns:a16="http://schemas.microsoft.com/office/drawing/2014/main" id="{BF3CC2D3-D849-C760-2AA8-6F81148D21EA}"/>
+              </a:ext>
+            </a:extLst>
+          </p:cNvPr>
+          <p:cNvSpPr>
+            <a:spLocks noGrp="1"/>
+          </p:cNvSpPr>
+          <p:nvPr>
+            <p:ph idx="1"/>
+          </p:nvPr>
+        </p:nvSpPr>
+        <p:spPr/>
+        <p:txBody>
+          <a:bodyPr/>
+          <a:lstStyle/>
+          <a:p>
+            <a:pPr marL="514350" indent="-514350">
+              <a:buAutoNum type="arabicPeriod"/>
+            </a:pPr>
+            <a:r>
+              <a:rPr lang="ja-JP" altLang="en-US" dirty="0"/>
+              <a:t>まだ選ばれていないカードからランダムに一枚選ぶ</a:t>
+            </a:r>
+            <a:endParaRPr lang="en-US" altLang="ja-JP" dirty="0"/>
+          </a:p>
+          <a:p>
+            <a:pPr marL="514350" indent="-514350">
+              <a:buAutoNum type="arabicPeriod"/>
+            </a:pPr>
+            <a:r>
+              <a:rPr kumimoji="1" lang="ja-JP" altLang="en-US" dirty="0"/>
+              <a:t>まだ選ばれていないカードの右端と入れ替える</a:t>
+            </a:r>
+            <a:endParaRPr lang="en-US" altLang="ja-JP" dirty="0"/>
+          </a:p>
+          <a:p>
+            <a:pPr marL="514350" indent="-514350">
+              <a:buAutoNum type="arabicPeriod"/>
+            </a:pPr>
+            <a:r>
+              <a:rPr kumimoji="1" lang="en-US" altLang="ja-JP" dirty="0"/>
+              <a:t>1, 2 </a:t>
+            </a:r>
+            <a:r>
+              <a:rPr kumimoji="1" lang="ja-JP" altLang="en-US" dirty="0"/>
+              <a:t>を繰り返す</a:t>
+            </a:r>
+            <a:endParaRPr kumimoji="1" lang="en-US" altLang="ja-JP" dirty="0"/>
+          </a:p>
+        </p:txBody>
+      </p:sp>
+      <p:sp>
+        <p:nvSpPr>
+          <p:cNvPr id="5" name="四角形: 角を丸くする 4">
+            <a:extLst>
+              <a:ext uri="{FF2B5EF4-FFF2-40B4-BE49-F238E27FC236}">
+                <a16:creationId xmlns:a16="http://schemas.microsoft.com/office/drawing/2014/main" id="{E3B1CBAC-02EA-4562-4EF1-0BECCC28D286}"/>
+              </a:ext>
+            </a:extLst>
+          </p:cNvPr>
+          <p:cNvSpPr/>
+          <p:nvPr/>
+        </p:nvSpPr>
+        <p:spPr>
+          <a:xfrm>
+            <a:off x="3102429" y="4082140"/>
+            <a:ext cx="1132113" cy="1589315"/>
+          </a:xfrm>
+          <a:prstGeom prst="roundRect">
+            <a:avLst/>
+          </a:prstGeom>
+          <a:solidFill>
+            <a:srgbClr val="0070C0"/>
+          </a:solidFill>
+        </p:spPr>
+        <p:style>
+          <a:lnRef idx="2">
+            <a:schemeClr val="accent1">
+              <a:shade val="15000"/>
+            </a:schemeClr>
+          </a:lnRef>
+          <a:fillRef idx="1">
+            <a:schemeClr val="accent1"/>
+          </a:fillRef>
+          <a:effectRef idx="0">
+            <a:schemeClr val="accent1"/>
+          </a:effectRef>
+          <a:fontRef idx="minor">
+            <a:schemeClr val="lt1"/>
+          </a:fontRef>
+        </p:style>
+        <p:txBody>
+          <a:bodyPr rtlCol="0" anchor="ctr"/>
+          <a:lstStyle/>
+          <a:p>
+            <a:pPr algn="ctr"/>
+            <a:r>
+              <a:rPr kumimoji="1" lang="ja-JP" altLang="en-US" sz="4400" b="1" dirty="0">
+                <a:latin typeface="Cica" panose="020B0409020203020207" pitchFamily="49" charset="-128"/>
+                <a:ea typeface="Cica" panose="020B0409020203020207" pitchFamily="49" charset="-128"/>
+              </a:rPr>
+              <a:t>１</a:t>
+            </a:r>
+          </a:p>
+        </p:txBody>
+      </p:sp>
+      <p:sp>
+        <p:nvSpPr>
+          <p:cNvPr id="6" name="四角形: 角を丸くする 5">
+            <a:extLst>
+              <a:ext uri="{FF2B5EF4-FFF2-40B4-BE49-F238E27FC236}">
+                <a16:creationId xmlns:a16="http://schemas.microsoft.com/office/drawing/2014/main" id="{0FBFA759-C575-90D3-1C6D-D02308C9A283}"/>
+              </a:ext>
+            </a:extLst>
+          </p:cNvPr>
+          <p:cNvSpPr/>
+          <p:nvPr/>
+        </p:nvSpPr>
+        <p:spPr>
+          <a:xfrm>
+            <a:off x="4680858" y="4082141"/>
+            <a:ext cx="1132113" cy="1589315"/>
+          </a:xfrm>
+          <a:prstGeom prst="roundRect">
+            <a:avLst/>
+          </a:prstGeom>
+          <a:solidFill>
+            <a:srgbClr val="0070C0"/>
+          </a:solidFill>
+        </p:spPr>
+        <p:style>
+          <a:lnRef idx="2">
+            <a:schemeClr val="accent1">
+              <a:shade val="15000"/>
+            </a:schemeClr>
+          </a:lnRef>
+          <a:fillRef idx="1">
+            <a:schemeClr val="accent1"/>
+          </a:fillRef>
+          <a:effectRef idx="0">
+            <a:schemeClr val="accent1"/>
+          </a:effectRef>
+          <a:fontRef idx="minor">
+            <a:schemeClr val="lt1"/>
+          </a:fontRef>
+        </p:style>
+        <p:txBody>
+          <a:bodyPr rtlCol="0" anchor="ctr"/>
+          <a:lstStyle/>
+          <a:p>
+            <a:pPr algn="ctr"/>
+            <a:r>
+              <a:rPr kumimoji="1" lang="en-US" altLang="ja-JP" sz="4400" b="1" dirty="0">
+                <a:latin typeface="Cica" panose="020B0409020203020207" pitchFamily="49" charset="-128"/>
+                <a:ea typeface="Cica" panose="020B0409020203020207" pitchFamily="49" charset="-128"/>
+              </a:rPr>
+              <a:t>2</a:t>
+            </a:r>
+            <a:endParaRPr kumimoji="1" lang="ja-JP" altLang="en-US" sz="4400" b="1" dirty="0">
+              <a:latin typeface="Cica" panose="020B0409020203020207" pitchFamily="49" charset="-128"/>
+              <a:ea typeface="Cica" panose="020B0409020203020207" pitchFamily="49" charset="-128"/>
+            </a:endParaRPr>
+          </a:p>
+        </p:txBody>
+      </p:sp>
+      <p:sp>
+        <p:nvSpPr>
+          <p:cNvPr id="7" name="四角形: 角を丸くする 6">
+            <a:extLst>
+              <a:ext uri="{FF2B5EF4-FFF2-40B4-BE49-F238E27FC236}">
+                <a16:creationId xmlns:a16="http://schemas.microsoft.com/office/drawing/2014/main" id="{A839FA76-3C6A-4DE5-DBB5-31C6CEEDBC11}"/>
+              </a:ext>
+            </a:extLst>
+          </p:cNvPr>
+          <p:cNvSpPr/>
+          <p:nvPr/>
+        </p:nvSpPr>
+        <p:spPr>
+          <a:xfrm>
+            <a:off x="6259287" y="4082141"/>
+            <a:ext cx="1132113" cy="1589315"/>
+          </a:xfrm>
+          <a:prstGeom prst="roundRect">
+            <a:avLst/>
+          </a:prstGeom>
+          <a:solidFill>
+            <a:srgbClr val="0070C0"/>
+          </a:solidFill>
+        </p:spPr>
+        <p:style>
+          <a:lnRef idx="2">
+            <a:schemeClr val="accent1">
+              <a:shade val="15000"/>
+            </a:schemeClr>
+          </a:lnRef>
+          <a:fillRef idx="1">
+            <a:schemeClr val="accent1"/>
+          </a:fillRef>
+          <a:effectRef idx="0">
+            <a:schemeClr val="accent1"/>
+          </a:effectRef>
+          <a:fontRef idx="minor">
+            <a:schemeClr val="lt1"/>
+          </a:fontRef>
+        </p:style>
+        <p:txBody>
+          <a:bodyPr rtlCol="0" anchor="ctr"/>
+          <a:lstStyle/>
+          <a:p>
+            <a:pPr algn="ctr"/>
+            <a:r>
+              <a:rPr kumimoji="1" lang="en-US" altLang="ja-JP" sz="4400" b="1" dirty="0">
+                <a:latin typeface="Cica" panose="020B0409020203020207" pitchFamily="49" charset="-128"/>
+                <a:ea typeface="Cica" panose="020B0409020203020207" pitchFamily="49" charset="-128"/>
+              </a:rPr>
+              <a:t>3</a:t>
+            </a:r>
+            <a:endParaRPr kumimoji="1" lang="ja-JP" altLang="en-US" sz="4400" b="1" dirty="0">
+              <a:latin typeface="Cica" panose="020B0409020203020207" pitchFamily="49" charset="-128"/>
+              <a:ea typeface="Cica" panose="020B0409020203020207" pitchFamily="49" charset="-128"/>
+            </a:endParaRPr>
+          </a:p>
+        </p:txBody>
+      </p:sp>
+      <p:sp>
+        <p:nvSpPr>
+          <p:cNvPr id="8" name="四角形: 角を丸くする 7">
+            <a:extLst>
+              <a:ext uri="{FF2B5EF4-FFF2-40B4-BE49-F238E27FC236}">
+                <a16:creationId xmlns:a16="http://schemas.microsoft.com/office/drawing/2014/main" id="{421F763F-20AD-837A-E95A-5FD0CFC9B7F1}"/>
+              </a:ext>
+            </a:extLst>
+          </p:cNvPr>
+          <p:cNvSpPr/>
+          <p:nvPr/>
+        </p:nvSpPr>
+        <p:spPr>
+          <a:xfrm>
+            <a:off x="7837716" y="4082140"/>
+            <a:ext cx="1132113" cy="1589315"/>
+          </a:xfrm>
+          <a:prstGeom prst="roundRect">
+            <a:avLst/>
+          </a:prstGeom>
+          <a:solidFill>
+            <a:srgbClr val="0070C0"/>
+          </a:solidFill>
+        </p:spPr>
+        <p:style>
+          <a:lnRef idx="2">
+            <a:schemeClr val="accent1">
+              <a:shade val="15000"/>
+            </a:schemeClr>
+          </a:lnRef>
+          <a:fillRef idx="1">
+            <a:schemeClr val="accent1"/>
+          </a:fillRef>
+          <a:effectRef idx="0">
+            <a:schemeClr val="accent1"/>
+          </a:effectRef>
+          <a:fontRef idx="minor">
+            <a:schemeClr val="lt1"/>
+          </a:fontRef>
+        </p:style>
+        <p:txBody>
+          <a:bodyPr rtlCol="0" anchor="ctr"/>
+          <a:lstStyle/>
+          <a:p>
+            <a:pPr algn="ctr"/>
+            <a:r>
+              <a:rPr kumimoji="1" lang="en-US" altLang="ja-JP" sz="4400" b="1" dirty="0">
+                <a:latin typeface="Cica" panose="020B0409020203020207" pitchFamily="49" charset="-128"/>
+                <a:ea typeface="Cica" panose="020B0409020203020207" pitchFamily="49" charset="-128"/>
+              </a:rPr>
+              <a:t>4</a:t>
+            </a:r>
+            <a:endParaRPr kumimoji="1" lang="ja-JP" altLang="en-US" sz="4400" b="1" dirty="0">
+              <a:latin typeface="Cica" panose="020B0409020203020207" pitchFamily="49" charset="-128"/>
+              <a:ea typeface="Cica" panose="020B0409020203020207" pitchFamily="49" charset="-128"/>
+            </a:endParaRPr>
+          </a:p>
+        </p:txBody>
+      </p:sp>
+      <p:sp>
+        <p:nvSpPr>
+          <p:cNvPr id="14" name="四角形: 角を丸くする 13">
+            <a:extLst>
+              <a:ext uri="{FF2B5EF4-FFF2-40B4-BE49-F238E27FC236}">
+                <a16:creationId xmlns:a16="http://schemas.microsoft.com/office/drawing/2014/main" id="{DE7B0767-B502-0033-85E4-7E6DD09C5388}"/>
+              </a:ext>
+            </a:extLst>
+          </p:cNvPr>
+          <p:cNvSpPr/>
+          <p:nvPr/>
+        </p:nvSpPr>
+        <p:spPr>
+          <a:xfrm>
+            <a:off x="7837715" y="4082140"/>
+            <a:ext cx="1132113" cy="1589315"/>
+          </a:xfrm>
+          <a:prstGeom prst="roundRect">
+            <a:avLst/>
+          </a:prstGeom>
+          <a:solidFill>
+            <a:schemeClr val="tx1"/>
+          </a:solidFill>
+        </p:spPr>
+        <p:style>
+          <a:lnRef idx="2">
+            <a:schemeClr val="accent1">
+              <a:shade val="15000"/>
+            </a:schemeClr>
+          </a:lnRef>
+          <a:fillRef idx="1">
+            <a:schemeClr val="accent1"/>
+          </a:fillRef>
+          <a:effectRef idx="0">
+            <a:schemeClr val="accent1"/>
+          </a:effectRef>
+          <a:fontRef idx="minor">
+            <a:schemeClr val="lt1"/>
+          </a:fontRef>
+        </p:style>
+        <p:txBody>
+          <a:bodyPr rtlCol="0" anchor="ctr"/>
+          <a:lstStyle/>
+          <a:p>
+            <a:pPr algn="ctr"/>
+            <a:r>
+              <a:rPr kumimoji="1" lang="en-US" altLang="ja-JP" sz="4400" b="1" dirty="0">
+                <a:latin typeface="Cica" panose="020B0409020203020207" pitchFamily="49" charset="-128"/>
+                <a:ea typeface="Cica" panose="020B0409020203020207" pitchFamily="49" charset="-128"/>
+              </a:rPr>
+              <a:t>3</a:t>
+            </a:r>
+            <a:endParaRPr kumimoji="1" lang="ja-JP" altLang="en-US" sz="4400" b="1" dirty="0">
+              <a:latin typeface="Cica" panose="020B0409020203020207" pitchFamily="49" charset="-128"/>
+              <a:ea typeface="Cica" panose="020B0409020203020207" pitchFamily="49" charset="-128"/>
+            </a:endParaRPr>
+          </a:p>
+        </p:txBody>
+      </p:sp>
+      <p:sp>
+        <p:nvSpPr>
+          <p:cNvPr id="15" name="四角形: 角を丸くする 14">
+            <a:extLst>
+              <a:ext uri="{FF2B5EF4-FFF2-40B4-BE49-F238E27FC236}">
+                <a16:creationId xmlns:a16="http://schemas.microsoft.com/office/drawing/2014/main" id="{6AB54318-F8CB-D34A-18EE-CC22383DEC1F}"/>
+              </a:ext>
+            </a:extLst>
+          </p:cNvPr>
+          <p:cNvSpPr/>
+          <p:nvPr/>
+        </p:nvSpPr>
+        <p:spPr>
+          <a:xfrm>
+            <a:off x="6259287" y="4082140"/>
+            <a:ext cx="1132113" cy="1589315"/>
+          </a:xfrm>
+          <a:prstGeom prst="roundRect">
+            <a:avLst/>
+          </a:prstGeom>
+          <a:solidFill>
+            <a:srgbClr val="0070C0"/>
+          </a:solidFill>
+        </p:spPr>
+        <p:style>
+          <a:lnRef idx="2">
+            <a:schemeClr val="accent1">
+              <a:shade val="15000"/>
+            </a:schemeClr>
+          </a:lnRef>
+          <a:fillRef idx="1">
+            <a:schemeClr val="accent1"/>
+          </a:fillRef>
+          <a:effectRef idx="0">
+            <a:schemeClr val="accent1"/>
+          </a:effectRef>
+          <a:fontRef idx="minor">
+            <a:schemeClr val="lt1"/>
+          </a:fontRef>
+        </p:style>
+        <p:txBody>
+          <a:bodyPr rtlCol="0" anchor="ctr"/>
+          <a:lstStyle/>
+          <a:p>
+            <a:pPr algn="ctr"/>
+            <a:r>
+              <a:rPr kumimoji="1" lang="en-US" altLang="ja-JP" sz="4400" b="1" dirty="0">
+                <a:latin typeface="Cica" panose="020B0409020203020207" pitchFamily="49" charset="-128"/>
+                <a:ea typeface="Cica" panose="020B0409020203020207" pitchFamily="49" charset="-128"/>
+              </a:rPr>
+              <a:t>4</a:t>
+            </a:r>
+            <a:endParaRPr kumimoji="1" lang="ja-JP" altLang="en-US" sz="4400" b="1" dirty="0">
+              <a:latin typeface="Cica" panose="020B0409020203020207" pitchFamily="49" charset="-128"/>
+              <a:ea typeface="Cica" panose="020B0409020203020207" pitchFamily="49" charset="-128"/>
+            </a:endParaRPr>
+          </a:p>
+        </p:txBody>
+      </p:sp>
+      <p:sp>
+        <p:nvSpPr>
+          <p:cNvPr id="17" name="四角形: 角を丸くする 16">
+            <a:extLst>
+              <a:ext uri="{FF2B5EF4-FFF2-40B4-BE49-F238E27FC236}">
+                <a16:creationId xmlns:a16="http://schemas.microsoft.com/office/drawing/2014/main" id="{1583A5F9-BCF2-3B97-8650-EDEB1F7239A6}"/>
+              </a:ext>
+            </a:extLst>
+          </p:cNvPr>
+          <p:cNvSpPr/>
+          <p:nvPr/>
+        </p:nvSpPr>
+        <p:spPr>
+          <a:xfrm>
+            <a:off x="6259286" y="4082140"/>
+            <a:ext cx="1132113" cy="1589315"/>
+          </a:xfrm>
+          <a:prstGeom prst="roundRect">
+            <a:avLst/>
+          </a:prstGeom>
+          <a:solidFill>
+            <a:schemeClr val="tx1"/>
+          </a:solidFill>
+        </p:spPr>
+        <p:style>
+          <a:lnRef idx="2">
+            <a:schemeClr val="accent1">
+              <a:shade val="15000"/>
+            </a:schemeClr>
+          </a:lnRef>
+          <a:fillRef idx="1">
+            <a:schemeClr val="accent1"/>
+          </a:fillRef>
+          <a:effectRef idx="0">
+            <a:schemeClr val="accent1"/>
+          </a:effectRef>
+          <a:fontRef idx="minor">
+            <a:schemeClr val="lt1"/>
+          </a:fontRef>
+        </p:style>
+        <p:txBody>
+          <a:bodyPr rtlCol="0" anchor="ctr"/>
+          <a:lstStyle/>
+          <a:p>
+            <a:pPr algn="ctr"/>
+            <a:r>
+              <a:rPr lang="en-US" altLang="ja-JP" sz="4400" b="1" dirty="0">
+                <a:latin typeface="Cica" panose="020B0409020203020207" pitchFamily="49" charset="-128"/>
+                <a:ea typeface="Cica" panose="020B0409020203020207" pitchFamily="49" charset="-128"/>
+              </a:rPr>
+              <a:t>1</a:t>
+            </a:r>
+            <a:endParaRPr kumimoji="1" lang="ja-JP" altLang="en-US" sz="4400" b="1" dirty="0">
+              <a:latin typeface="Cica" panose="020B0409020203020207" pitchFamily="49" charset="-128"/>
+              <a:ea typeface="Cica" panose="020B0409020203020207" pitchFamily="49" charset="-128"/>
+            </a:endParaRPr>
+          </a:p>
+        </p:txBody>
+      </p:sp>
+      <p:sp>
+        <p:nvSpPr>
+          <p:cNvPr id="18" name="四角形: 角を丸くする 17">
+            <a:extLst>
+              <a:ext uri="{FF2B5EF4-FFF2-40B4-BE49-F238E27FC236}">
+                <a16:creationId xmlns:a16="http://schemas.microsoft.com/office/drawing/2014/main" id="{960073F2-AE63-9314-E370-17E2CF97AA30}"/>
+              </a:ext>
+            </a:extLst>
+          </p:cNvPr>
+          <p:cNvSpPr/>
+          <p:nvPr/>
+        </p:nvSpPr>
+        <p:spPr>
+          <a:xfrm>
+            <a:off x="3102428" y="4082140"/>
+            <a:ext cx="1132113" cy="1589315"/>
+          </a:xfrm>
+          <a:prstGeom prst="roundRect">
+            <a:avLst/>
+          </a:prstGeom>
+          <a:solidFill>
+            <a:srgbClr val="0070C0"/>
+          </a:solidFill>
+        </p:spPr>
+        <p:style>
+          <a:lnRef idx="2">
+            <a:schemeClr val="accent1">
+              <a:shade val="15000"/>
+            </a:schemeClr>
+          </a:lnRef>
+          <a:fillRef idx="1">
+            <a:schemeClr val="accent1"/>
+          </a:fillRef>
+          <a:effectRef idx="0">
+            <a:schemeClr val="accent1"/>
+          </a:effectRef>
+          <a:fontRef idx="minor">
+            <a:schemeClr val="lt1"/>
+          </a:fontRef>
+        </p:style>
+        <p:txBody>
+          <a:bodyPr rtlCol="0" anchor="ctr"/>
+          <a:lstStyle/>
+          <a:p>
+            <a:pPr algn="ctr"/>
+            <a:r>
+              <a:rPr lang="en-US" altLang="ja-JP" sz="4400" b="1" dirty="0">
+                <a:latin typeface="Cica" panose="020B0409020203020207" pitchFamily="49" charset="-128"/>
+                <a:ea typeface="Cica" panose="020B0409020203020207" pitchFamily="49" charset="-128"/>
+              </a:rPr>
+              <a:t>4</a:t>
+            </a:r>
+            <a:endParaRPr kumimoji="1" lang="ja-JP" altLang="en-US" sz="4400" b="1" dirty="0">
+              <a:latin typeface="Cica" panose="020B0409020203020207" pitchFamily="49" charset="-128"/>
+              <a:ea typeface="Cica" panose="020B0409020203020207" pitchFamily="49" charset="-128"/>
+            </a:endParaRPr>
+          </a:p>
+        </p:txBody>
+      </p:sp>
+      <p:sp>
+        <p:nvSpPr>
+          <p:cNvPr id="19" name="四角形: 角を丸くする 18">
+            <a:extLst>
+              <a:ext uri="{FF2B5EF4-FFF2-40B4-BE49-F238E27FC236}">
+                <a16:creationId xmlns:a16="http://schemas.microsoft.com/office/drawing/2014/main" id="{287AD559-A758-F7FC-32FC-3571596D574B}"/>
+              </a:ext>
+            </a:extLst>
+          </p:cNvPr>
+          <p:cNvSpPr/>
+          <p:nvPr/>
+        </p:nvSpPr>
+        <p:spPr>
+          <a:xfrm>
+            <a:off x="4680857" y="4082140"/>
+            <a:ext cx="1132113" cy="1589315"/>
+          </a:xfrm>
+          <a:prstGeom prst="roundRect">
+            <a:avLst/>
+          </a:prstGeom>
+          <a:solidFill>
+            <a:schemeClr val="tx1"/>
+          </a:solidFill>
+        </p:spPr>
+        <p:style>
+          <a:lnRef idx="2">
+            <a:schemeClr val="accent1">
+              <a:shade val="15000"/>
+            </a:schemeClr>
+          </a:lnRef>
+          <a:fillRef idx="1">
+            <a:schemeClr val="accent1"/>
+          </a:fillRef>
+          <a:effectRef idx="0">
+            <a:schemeClr val="accent1"/>
+          </a:effectRef>
+          <a:fontRef idx="minor">
+            <a:schemeClr val="lt1"/>
+          </a:fontRef>
+        </p:style>
+        <p:txBody>
+          <a:bodyPr rtlCol="0" anchor="ctr"/>
+          <a:lstStyle/>
+          <a:p>
+            <a:pPr algn="ctr"/>
+            <a:r>
+              <a:rPr kumimoji="1" lang="en-US" altLang="ja-JP" sz="4400" b="1" dirty="0">
+                <a:latin typeface="Cica" panose="020B0409020203020207" pitchFamily="49" charset="-128"/>
+                <a:ea typeface="Cica" panose="020B0409020203020207" pitchFamily="49" charset="-128"/>
+              </a:rPr>
+              <a:t>2</a:t>
+            </a:r>
+            <a:endParaRPr kumimoji="1" lang="ja-JP" altLang="en-US" sz="4400" b="1" dirty="0">
+              <a:latin typeface="Cica" panose="020B0409020203020207" pitchFamily="49" charset="-128"/>
+              <a:ea typeface="Cica" panose="020B0409020203020207" pitchFamily="49" charset="-128"/>
+            </a:endParaRPr>
+          </a:p>
+        </p:txBody>
+      </p:sp>
+    </p:spTree>
+    <p:extLst>
+      <p:ext uri="{BB962C8B-B14F-4D97-AF65-F5344CB8AC3E}">
+        <p14:creationId xmlns:p14="http://schemas.microsoft.com/office/powerpoint/2010/main" val="762848387"/>
+      </p:ext>
+    </p:extLst>
+  </p:cSld>
+  <p:clrMapOvr>
+    <a:masterClrMapping/>
+  </p:clrMapOvr>
+  <p:timing>
+    <p:tnLst>
+      <p:par>
+        <p:cTn id="1" dur="indefinite" restart="never" nodeType="tmRoot">
+          <p:childTnLst>
+            <p:seq concurrent="1" nextAc="seek">
+              <p:cTn id="2" dur="indefinite" nodeType="mainSeq">
+                <p:childTnLst>
+                  <p:par>
+                    <p:cTn id="3" fill="hold">
+                      <p:stCondLst>
+                        <p:cond delay="indefinite"/>
+                      </p:stCondLst>
+                      <p:childTnLst>
+                        <p:par>
+                          <p:cTn id="4" fill="hold">
+                            <p:stCondLst>
+                              <p:cond delay="0"/>
+                            </p:stCondLst>
+                            <p:childTnLst>
+                              <p:par>
+                                <p:cTn id="5" presetID="26" presetClass="emph" presetSubtype="0" fill="hold" grpId="0" nodeType="clickEffect">
+                                  <p:stCondLst>
+                                    <p:cond delay="0"/>
+                                  </p:stCondLst>
+                                  <p:childTnLst>
+                                    <p:animEffect transition="out" filter="fade">
+                                      <p:cBhvr>
+                                        <p:cTn id="6" dur="1000" tmFilter="0, 0; .2, .5; .8, .5; 1, 0"/>
+                                        <p:tgtEl>
+                                          <p:spTgt spid="7"/>
+                                        </p:tgtEl>
+                                      </p:cBhvr>
+                                    </p:animEffect>
+                                    <p:animScale>
+                                      <p:cBhvr>
+                                        <p:cTn id="7" dur="500" autoRev="1" fill="hold"/>
+                                        <p:tgtEl>
+                                          <p:spTgt spid="7"/>
+                                        </p:tgtEl>
+                                      </p:cBhvr>
+                                      <p:by x="105000" y="105000"/>
+                                    </p:animScale>
+                                  </p:childTnLst>
+                                </p:cTn>
+                              </p:par>
+                            </p:childTnLst>
+                          </p:cTn>
+                        </p:par>
+                      </p:childTnLst>
+                    </p:cTn>
+                  </p:par>
+                  <p:par>
+                    <p:cTn id="8" fill="hold">
+                      <p:stCondLst>
+                        <p:cond delay="indefinite"/>
+                      </p:stCondLst>
+                      <p:childTnLst>
+                        <p:par>
+                          <p:cTn id="9" fill="hold">
+                            <p:stCondLst>
+                              <p:cond delay="0"/>
+                            </p:stCondLst>
+                            <p:childTnLst>
+                              <p:par>
+                                <p:cTn id="10" presetID="42" presetClass="exit" presetSubtype="0" fill="hold" grpId="1" nodeType="clickEffect">
+                                  <p:stCondLst>
+                                    <p:cond delay="0"/>
+                                  </p:stCondLst>
+                                  <p:childTnLst>
+                                    <p:animEffect transition="out" filter="fade">
+                                      <p:cBhvr>
+                                        <p:cTn id="11" dur="500"/>
+                                        <p:tgtEl>
+                                          <p:spTgt spid="7"/>
+                                        </p:tgtEl>
+                                      </p:cBhvr>
+                                    </p:animEffect>
+                                    <p:anim calcmode="lin" valueType="num">
+                                      <p:cBhvr>
+                                        <p:cTn id="12" dur="500"/>
+                                        <p:tgtEl>
+                                          <p:spTgt spid="7"/>
+                                        </p:tgtEl>
+                                        <p:attrNameLst>
+                                          <p:attrName>ppt_x</p:attrName>
+                                        </p:attrNameLst>
+                                      </p:cBhvr>
+                                      <p:tavLst>
+                                        <p:tav tm="0">
+                                          <p:val>
+                                            <p:strVal val="ppt_x"/>
+                                          </p:val>
+                                        </p:tav>
+                                        <p:tav tm="100000">
+                                          <p:val>
+                                            <p:strVal val="ppt_x"/>
+                                          </p:val>
+                                        </p:tav>
+                                      </p:tavLst>
+                                    </p:anim>
+                                    <p:anim calcmode="lin" valueType="num">
+                                      <p:cBhvr>
+                                        <p:cTn id="13" dur="500"/>
+                                        <p:tgtEl>
+                                          <p:spTgt spid="7"/>
+                                        </p:tgtEl>
+                                        <p:attrNameLst>
+                                          <p:attrName>ppt_y</p:attrName>
+                                        </p:attrNameLst>
+                                      </p:cBhvr>
+                                      <p:tavLst>
+                                        <p:tav tm="0">
+                                          <p:val>
+                                            <p:strVal val="ppt_y"/>
+                                          </p:val>
+                                        </p:tav>
+                                        <p:tav tm="100000">
+                                          <p:val>
+                                            <p:strVal val="ppt_y+.1"/>
+                                          </p:val>
+                                        </p:tav>
+                                      </p:tavLst>
+                                    </p:anim>
+                                    <p:set>
+                                      <p:cBhvr>
+                                        <p:cTn id="14" dur="1" fill="hold">
+                                          <p:stCondLst>
+                                            <p:cond delay="499"/>
+                                          </p:stCondLst>
+                                        </p:cTn>
+                                        <p:tgtEl>
+                                          <p:spTgt spid="7"/>
+                                        </p:tgtEl>
+                                        <p:attrNameLst>
+                                          <p:attrName>style.visibility</p:attrName>
+                                        </p:attrNameLst>
+                                      </p:cBhvr>
+                                      <p:to>
+                                        <p:strVal val="hidden"/>
+                                      </p:to>
+                                    </p:set>
+                                  </p:childTnLst>
+                                </p:cTn>
+                              </p:par>
+                            </p:childTnLst>
+                          </p:cTn>
+                        </p:par>
+                      </p:childTnLst>
+                    </p:cTn>
+                  </p:par>
+                  <p:par>
+                    <p:cTn id="15" fill="hold">
+                      <p:stCondLst>
+                        <p:cond delay="indefinite"/>
+                      </p:stCondLst>
+                      <p:childTnLst>
+                        <p:par>
+                          <p:cTn id="16" fill="hold">
+                            <p:stCondLst>
+                              <p:cond delay="0"/>
+                            </p:stCondLst>
+                            <p:childTnLst>
+                              <p:par>
+                                <p:cTn id="17" presetID="42" presetClass="exit" presetSubtype="0" fill="hold" grpId="0" nodeType="clickEffect">
+                                  <p:stCondLst>
+                                    <p:cond delay="0"/>
+                                  </p:stCondLst>
+                                  <p:childTnLst>
+                                    <p:animEffect transition="out" filter="fade">
+                                      <p:cBhvr>
+                                        <p:cTn id="18" dur="500"/>
+                                        <p:tgtEl>
+                                          <p:spTgt spid="8"/>
+                                        </p:tgtEl>
+                                      </p:cBhvr>
+                                    </p:animEffect>
+                                    <p:anim calcmode="lin" valueType="num">
+                                      <p:cBhvr>
+                                        <p:cTn id="19" dur="500"/>
+                                        <p:tgtEl>
+                                          <p:spTgt spid="8"/>
+                                        </p:tgtEl>
+                                        <p:attrNameLst>
+                                          <p:attrName>ppt_x</p:attrName>
+                                        </p:attrNameLst>
+                                      </p:cBhvr>
+                                      <p:tavLst>
+                                        <p:tav tm="0">
+                                          <p:val>
+                                            <p:strVal val="ppt_x"/>
+                                          </p:val>
+                                        </p:tav>
+                                        <p:tav tm="100000">
+                                          <p:val>
+                                            <p:strVal val="ppt_x"/>
+                                          </p:val>
+                                        </p:tav>
+                                      </p:tavLst>
+                                    </p:anim>
+                                    <p:anim calcmode="lin" valueType="num">
+                                      <p:cBhvr>
+                                        <p:cTn id="20" dur="500"/>
+                                        <p:tgtEl>
+                                          <p:spTgt spid="8"/>
+                                        </p:tgtEl>
+                                        <p:attrNameLst>
+                                          <p:attrName>ppt_y</p:attrName>
+                                        </p:attrNameLst>
+                                      </p:cBhvr>
+                                      <p:tavLst>
+                                        <p:tav tm="0">
+                                          <p:val>
+                                            <p:strVal val="ppt_y"/>
+                                          </p:val>
+                                        </p:tav>
+                                        <p:tav tm="100000">
+                                          <p:val>
+                                            <p:strVal val="ppt_y+.1"/>
+                                          </p:val>
+                                        </p:tav>
+                                      </p:tavLst>
+                                    </p:anim>
+                                    <p:set>
+                                      <p:cBhvr>
+                                        <p:cTn id="21" dur="1" fill="hold">
+                                          <p:stCondLst>
+                                            <p:cond delay="499"/>
+                                          </p:stCondLst>
+                                        </p:cTn>
+                                        <p:tgtEl>
+                                          <p:spTgt spid="8"/>
+                                        </p:tgtEl>
+                                        <p:attrNameLst>
+                                          <p:attrName>style.visibility</p:attrName>
+                                        </p:attrNameLst>
+                                      </p:cBhvr>
+                                      <p:to>
+                                        <p:strVal val="hidden"/>
+                                      </p:to>
+                                    </p:set>
+                                  </p:childTnLst>
+                                </p:cTn>
+                              </p:par>
+                            </p:childTnLst>
+                          </p:cTn>
+                        </p:par>
+                      </p:childTnLst>
+                    </p:cTn>
+                  </p:par>
+                  <p:par>
+                    <p:cTn id="22" fill="hold">
+                      <p:stCondLst>
+                        <p:cond delay="indefinite"/>
+                      </p:stCondLst>
+                      <p:childTnLst>
+                        <p:par>
+                          <p:cTn id="23" fill="hold">
+                            <p:stCondLst>
+                              <p:cond delay="0"/>
+                            </p:stCondLst>
+                            <p:childTnLst>
+                              <p:par>
+                                <p:cTn id="24" presetID="42" presetClass="entr" presetSubtype="0" fill="hold" grpId="0" nodeType="clickEffect">
+                                  <p:stCondLst>
+                                    <p:cond delay="0"/>
+                                  </p:stCondLst>
+                                  <p:childTnLst>
+                                    <p:set>
+                                      <p:cBhvr>
+                                        <p:cTn id="25" dur="1" fill="hold">
+                                          <p:stCondLst>
+                                            <p:cond delay="0"/>
+                                          </p:stCondLst>
+                                        </p:cTn>
+                                        <p:tgtEl>
+                                          <p:spTgt spid="14"/>
+                                        </p:tgtEl>
+                                        <p:attrNameLst>
+                                          <p:attrName>style.visibility</p:attrName>
+                                        </p:attrNameLst>
+                                      </p:cBhvr>
+                                      <p:to>
+                                        <p:strVal val="visible"/>
+                                      </p:to>
+                                    </p:set>
+                                    <p:animEffect transition="in" filter="fade">
+                                      <p:cBhvr>
+                                        <p:cTn id="26" dur="500"/>
+                                        <p:tgtEl>
+                                          <p:spTgt spid="14"/>
+                                        </p:tgtEl>
+                                      </p:cBhvr>
+                                    </p:animEffect>
+                                    <p:anim calcmode="lin" valueType="num">
+                                      <p:cBhvr>
+                                        <p:cTn id="27" dur="500" fill="hold"/>
+                                        <p:tgtEl>
+                                          <p:spTgt spid="14"/>
+                                        </p:tgtEl>
+                                        <p:attrNameLst>
+                                          <p:attrName>ppt_x</p:attrName>
+                                        </p:attrNameLst>
+                                      </p:cBhvr>
+                                      <p:tavLst>
+                                        <p:tav tm="0">
+                                          <p:val>
+                                            <p:strVal val="#ppt_x"/>
+                                          </p:val>
+                                        </p:tav>
+                                        <p:tav tm="100000">
+                                          <p:val>
+                                            <p:strVal val="#ppt_x"/>
+                                          </p:val>
+                                        </p:tav>
+                                      </p:tavLst>
+                                    </p:anim>
+                                    <p:anim calcmode="lin" valueType="num">
+                                      <p:cBhvr>
+                                        <p:cTn id="28" dur="500" fill="hold"/>
+                                        <p:tgtEl>
+                                          <p:spTgt spid="14"/>
+                                        </p:tgtEl>
+                                        <p:attrNameLst>
+                                          <p:attrName>ppt_y</p:attrName>
+                                        </p:attrNameLst>
+                                      </p:cBhvr>
+                                      <p:tavLst>
+                                        <p:tav tm="0">
+                                          <p:val>
+                                            <p:strVal val="#ppt_y+.1"/>
+                                          </p:val>
+                                        </p:tav>
+                                        <p:tav tm="100000">
+                                          <p:val>
+                                            <p:strVal val="#ppt_y"/>
+                                          </p:val>
+                                        </p:tav>
+                                      </p:tavLst>
+                                    </p:anim>
+                                  </p:childTnLst>
+                                </p:cTn>
+                              </p:par>
+                            </p:childTnLst>
+                          </p:cTn>
+                        </p:par>
+                      </p:childTnLst>
+                    </p:cTn>
+                  </p:par>
+                  <p:par>
+                    <p:cTn id="29" fill="hold">
+                      <p:stCondLst>
+                        <p:cond delay="indefinite"/>
+                      </p:stCondLst>
+                      <p:childTnLst>
+                        <p:par>
+                          <p:cTn id="30" fill="hold">
+                            <p:stCondLst>
+                              <p:cond delay="0"/>
+                            </p:stCondLst>
+                            <p:childTnLst>
+                              <p:par>
+                                <p:cTn id="31" presetID="42" presetClass="entr" presetSubtype="0" fill="hold" grpId="0" nodeType="clickEffect">
+                                  <p:stCondLst>
+                                    <p:cond delay="0"/>
+                                  </p:stCondLst>
+                                  <p:childTnLst>
+                                    <p:set>
+                                      <p:cBhvr>
+                                        <p:cTn id="32" dur="1" fill="hold">
+                                          <p:stCondLst>
+                                            <p:cond delay="0"/>
+                                          </p:stCondLst>
+                                        </p:cTn>
+                                        <p:tgtEl>
+                                          <p:spTgt spid="15"/>
+                                        </p:tgtEl>
+                                        <p:attrNameLst>
+                                          <p:attrName>style.visibility</p:attrName>
+                                        </p:attrNameLst>
+                                      </p:cBhvr>
+                                      <p:to>
+                                        <p:strVal val="visible"/>
+                                      </p:to>
+                                    </p:set>
+                                    <p:animEffect transition="in" filter="fade">
+                                      <p:cBhvr>
+                                        <p:cTn id="33" dur="500"/>
+                                        <p:tgtEl>
+                                          <p:spTgt spid="15"/>
+                                        </p:tgtEl>
+                                      </p:cBhvr>
+                                    </p:animEffect>
+                                    <p:anim calcmode="lin" valueType="num">
+                                      <p:cBhvr>
+                                        <p:cTn id="34" dur="500" fill="hold"/>
+                                        <p:tgtEl>
+                                          <p:spTgt spid="15"/>
+                                        </p:tgtEl>
+                                        <p:attrNameLst>
+                                          <p:attrName>ppt_x</p:attrName>
+                                        </p:attrNameLst>
+                                      </p:cBhvr>
+                                      <p:tavLst>
+                                        <p:tav tm="0">
+                                          <p:val>
+                                            <p:strVal val="#ppt_x"/>
+                                          </p:val>
+                                        </p:tav>
+                                        <p:tav tm="100000">
+                                          <p:val>
+                                            <p:strVal val="#ppt_x"/>
+                                          </p:val>
+                                        </p:tav>
+                                      </p:tavLst>
+                                    </p:anim>
+                                    <p:anim calcmode="lin" valueType="num">
+                                      <p:cBhvr>
+                                        <p:cTn id="35" dur="500" fill="hold"/>
+                                        <p:tgtEl>
+                                          <p:spTgt spid="15"/>
+                                        </p:tgtEl>
+                                        <p:attrNameLst>
+                                          <p:attrName>ppt_y</p:attrName>
+                                        </p:attrNameLst>
+                                      </p:cBhvr>
+                                      <p:tavLst>
+                                        <p:tav tm="0">
+                                          <p:val>
+                                            <p:strVal val="#ppt_y+.1"/>
+                                          </p:val>
+                                        </p:tav>
+                                        <p:tav tm="100000">
+                                          <p:val>
+                                            <p:strVal val="#ppt_y"/>
+                                          </p:val>
+                                        </p:tav>
+                                      </p:tavLst>
+                                    </p:anim>
+                                  </p:childTnLst>
+                                </p:cTn>
+                              </p:par>
+                            </p:childTnLst>
+                          </p:cTn>
+                        </p:par>
+                      </p:childTnLst>
+                    </p:cTn>
+                  </p:par>
+                  <p:par>
+                    <p:cTn id="36" fill="hold">
+                      <p:stCondLst>
+                        <p:cond delay="indefinite"/>
+                      </p:stCondLst>
+                      <p:childTnLst>
+                        <p:par>
+                          <p:cTn id="37" fill="hold">
+                            <p:stCondLst>
+                              <p:cond delay="0"/>
+                            </p:stCondLst>
+                            <p:childTnLst>
+                              <p:par>
+                                <p:cTn id="38" presetID="26" presetClass="emph" presetSubtype="0" fill="hold" grpId="0" nodeType="clickEffect">
+                                  <p:stCondLst>
+                                    <p:cond delay="0"/>
+                                  </p:stCondLst>
+                                  <p:childTnLst>
+                                    <p:animEffect transition="out" filter="fade">
+                                      <p:cBhvr>
+                                        <p:cTn id="39" dur="1000" tmFilter="0, 0; .2, .5; .8, .5; 1, 0"/>
+                                        <p:tgtEl>
+                                          <p:spTgt spid="5"/>
+                                        </p:tgtEl>
+                                      </p:cBhvr>
+                                    </p:animEffect>
+                                    <p:animScale>
+                                      <p:cBhvr>
+                                        <p:cTn id="40" dur="500" autoRev="1" fill="hold"/>
+                                        <p:tgtEl>
+                                          <p:spTgt spid="5"/>
+                                        </p:tgtEl>
+                                      </p:cBhvr>
+                                      <p:by x="105000" y="105000"/>
+                                    </p:animScale>
+                                  </p:childTnLst>
+                                </p:cTn>
+                              </p:par>
+                            </p:childTnLst>
+                          </p:cTn>
+                        </p:par>
+                      </p:childTnLst>
+                    </p:cTn>
+                  </p:par>
+                  <p:par>
+                    <p:cTn id="41" fill="hold">
+                      <p:stCondLst>
+                        <p:cond delay="indefinite"/>
+                      </p:stCondLst>
+                      <p:childTnLst>
+                        <p:par>
+                          <p:cTn id="42" fill="hold">
+                            <p:stCondLst>
+                              <p:cond delay="0"/>
+                            </p:stCondLst>
+                            <p:childTnLst>
+                              <p:par>
+                                <p:cTn id="43" presetID="42" presetClass="exit" presetSubtype="0" fill="hold" grpId="1" nodeType="clickEffect">
+                                  <p:stCondLst>
+                                    <p:cond delay="0"/>
+                                  </p:stCondLst>
+                                  <p:childTnLst>
+                                    <p:animEffect transition="out" filter="fade">
+                                      <p:cBhvr>
+                                        <p:cTn id="44" dur="500"/>
+                                        <p:tgtEl>
+                                          <p:spTgt spid="5"/>
+                                        </p:tgtEl>
+                                      </p:cBhvr>
+                                    </p:animEffect>
+                                    <p:anim calcmode="lin" valueType="num">
+                                      <p:cBhvr>
+                                        <p:cTn id="45" dur="500"/>
+                                        <p:tgtEl>
+                                          <p:spTgt spid="5"/>
+                                        </p:tgtEl>
+                                        <p:attrNameLst>
+                                          <p:attrName>ppt_x</p:attrName>
+                                        </p:attrNameLst>
+                                      </p:cBhvr>
+                                      <p:tavLst>
+                                        <p:tav tm="0">
+                                          <p:val>
+                                            <p:strVal val="ppt_x"/>
+                                          </p:val>
+                                        </p:tav>
+                                        <p:tav tm="100000">
+                                          <p:val>
+                                            <p:strVal val="ppt_x"/>
+                                          </p:val>
+                                        </p:tav>
+                                      </p:tavLst>
+                                    </p:anim>
+                                    <p:anim calcmode="lin" valueType="num">
+                                      <p:cBhvr>
+                                        <p:cTn id="46" dur="500"/>
+                                        <p:tgtEl>
+                                          <p:spTgt spid="5"/>
+                                        </p:tgtEl>
+                                        <p:attrNameLst>
+                                          <p:attrName>ppt_y</p:attrName>
+                                        </p:attrNameLst>
+                                      </p:cBhvr>
+                                      <p:tavLst>
+                                        <p:tav tm="0">
+                                          <p:val>
+                                            <p:strVal val="ppt_y"/>
+                                          </p:val>
+                                        </p:tav>
+                                        <p:tav tm="100000">
+                                          <p:val>
+                                            <p:strVal val="ppt_y+.1"/>
+                                          </p:val>
+                                        </p:tav>
+                                      </p:tavLst>
+                                    </p:anim>
+                                    <p:set>
+                                      <p:cBhvr>
+                                        <p:cTn id="47" dur="1" fill="hold">
+                                          <p:stCondLst>
+                                            <p:cond delay="499"/>
+                                          </p:stCondLst>
+                                        </p:cTn>
+                                        <p:tgtEl>
+                                          <p:spTgt spid="5"/>
+                                        </p:tgtEl>
+                                        <p:attrNameLst>
+                                          <p:attrName>style.visibility</p:attrName>
+                                        </p:attrNameLst>
+                                      </p:cBhvr>
+                                      <p:to>
+                                        <p:strVal val="hidden"/>
+                                      </p:to>
+                                    </p:set>
+                                  </p:childTnLst>
+                                </p:cTn>
+                              </p:par>
+                            </p:childTnLst>
+                          </p:cTn>
+                        </p:par>
+                      </p:childTnLst>
+                    </p:cTn>
+                  </p:par>
+                  <p:par>
+                    <p:cTn id="48" fill="hold">
+                      <p:stCondLst>
+                        <p:cond delay="indefinite"/>
+                      </p:stCondLst>
+                      <p:childTnLst>
+                        <p:par>
+                          <p:cTn id="49" fill="hold">
+                            <p:stCondLst>
+                              <p:cond delay="0"/>
+                            </p:stCondLst>
+                            <p:childTnLst>
+                              <p:par>
+                                <p:cTn id="50" presetID="42" presetClass="exit" presetSubtype="0" fill="hold" grpId="1" nodeType="clickEffect">
+                                  <p:stCondLst>
+                                    <p:cond delay="0"/>
+                                  </p:stCondLst>
+                                  <p:childTnLst>
+                                    <p:animEffect transition="out" filter="fade">
+                                      <p:cBhvr>
+                                        <p:cTn id="51" dur="500"/>
+                                        <p:tgtEl>
+                                          <p:spTgt spid="15"/>
+                                        </p:tgtEl>
+                                      </p:cBhvr>
+                                    </p:animEffect>
+                                    <p:anim calcmode="lin" valueType="num">
+                                      <p:cBhvr>
+                                        <p:cTn id="52" dur="500"/>
+                                        <p:tgtEl>
+                                          <p:spTgt spid="15"/>
+                                        </p:tgtEl>
+                                        <p:attrNameLst>
+                                          <p:attrName>ppt_x</p:attrName>
+                                        </p:attrNameLst>
+                                      </p:cBhvr>
+                                      <p:tavLst>
+                                        <p:tav tm="0">
+                                          <p:val>
+                                            <p:strVal val="ppt_x"/>
+                                          </p:val>
+                                        </p:tav>
+                                        <p:tav tm="100000">
+                                          <p:val>
+                                            <p:strVal val="ppt_x"/>
+                                          </p:val>
+                                        </p:tav>
+                                      </p:tavLst>
+                                    </p:anim>
+                                    <p:anim calcmode="lin" valueType="num">
+                                      <p:cBhvr>
+                                        <p:cTn id="53" dur="500"/>
+                                        <p:tgtEl>
+                                          <p:spTgt spid="15"/>
+                                        </p:tgtEl>
+                                        <p:attrNameLst>
+                                          <p:attrName>ppt_y</p:attrName>
+                                        </p:attrNameLst>
+                                      </p:cBhvr>
+                                      <p:tavLst>
+                                        <p:tav tm="0">
+                                          <p:val>
+                                            <p:strVal val="ppt_y"/>
+                                          </p:val>
+                                        </p:tav>
+                                        <p:tav tm="100000">
+                                          <p:val>
+                                            <p:strVal val="ppt_y+.1"/>
+                                          </p:val>
+                                        </p:tav>
+                                      </p:tavLst>
+                                    </p:anim>
+                                    <p:set>
+                                      <p:cBhvr>
+                                        <p:cTn id="54" dur="1" fill="hold">
+                                          <p:stCondLst>
+                                            <p:cond delay="499"/>
+                                          </p:stCondLst>
+                                        </p:cTn>
+                                        <p:tgtEl>
+                                          <p:spTgt spid="15"/>
+                                        </p:tgtEl>
+                                        <p:attrNameLst>
+                                          <p:attrName>style.visibility</p:attrName>
+                                        </p:attrNameLst>
+                                      </p:cBhvr>
+                                      <p:to>
+                                        <p:strVal val="hidden"/>
+                                      </p:to>
+                                    </p:set>
+                                  </p:childTnLst>
+                                </p:cTn>
+                              </p:par>
+                            </p:childTnLst>
+                          </p:cTn>
+                        </p:par>
+                      </p:childTnLst>
+                    </p:cTn>
+                  </p:par>
+                  <p:par>
+                    <p:cTn id="55" fill="hold">
+                      <p:stCondLst>
+                        <p:cond delay="indefinite"/>
+                      </p:stCondLst>
+                      <p:childTnLst>
+                        <p:par>
+                          <p:cTn id="56" fill="hold">
+                            <p:stCondLst>
+                              <p:cond delay="0"/>
+                            </p:stCondLst>
+                            <p:childTnLst>
+                              <p:par>
+                                <p:cTn id="57" presetID="42" presetClass="entr" presetSubtype="0" fill="hold" grpId="0" nodeType="clickEffect">
+                                  <p:stCondLst>
+                                    <p:cond delay="0"/>
+                                  </p:stCondLst>
+                                  <p:childTnLst>
+                                    <p:set>
+                                      <p:cBhvr>
+                                        <p:cTn id="58" dur="1" fill="hold">
+                                          <p:stCondLst>
+                                            <p:cond delay="0"/>
+                                          </p:stCondLst>
+                                        </p:cTn>
+                                        <p:tgtEl>
+                                          <p:spTgt spid="17"/>
+                                        </p:tgtEl>
+                                        <p:attrNameLst>
+                                          <p:attrName>style.visibility</p:attrName>
+                                        </p:attrNameLst>
+                                      </p:cBhvr>
+                                      <p:to>
+                                        <p:strVal val="visible"/>
+                                      </p:to>
+                                    </p:set>
+                                    <p:animEffect transition="in" filter="fade">
+                                      <p:cBhvr>
+                                        <p:cTn id="59" dur="500"/>
+                                        <p:tgtEl>
+                                          <p:spTgt spid="17"/>
+                                        </p:tgtEl>
+                                      </p:cBhvr>
+                                    </p:animEffect>
+                                    <p:anim calcmode="lin" valueType="num">
+                                      <p:cBhvr>
+                                        <p:cTn id="60" dur="500" fill="hold"/>
+                                        <p:tgtEl>
+                                          <p:spTgt spid="17"/>
+                                        </p:tgtEl>
+                                        <p:attrNameLst>
+                                          <p:attrName>ppt_x</p:attrName>
+                                        </p:attrNameLst>
+                                      </p:cBhvr>
+                                      <p:tavLst>
+                                        <p:tav tm="0">
+                                          <p:val>
+                                            <p:strVal val="#ppt_x"/>
+                                          </p:val>
+                                        </p:tav>
+                                        <p:tav tm="100000">
+                                          <p:val>
+                                            <p:strVal val="#ppt_x"/>
+                                          </p:val>
+                                        </p:tav>
+                                      </p:tavLst>
+                                    </p:anim>
+                                    <p:anim calcmode="lin" valueType="num">
+                                      <p:cBhvr>
+                                        <p:cTn id="61" dur="500" fill="hold"/>
+                                        <p:tgtEl>
+                                          <p:spTgt spid="17"/>
+                                        </p:tgtEl>
+                                        <p:attrNameLst>
+                                          <p:attrName>ppt_y</p:attrName>
+                                        </p:attrNameLst>
+                                      </p:cBhvr>
+                                      <p:tavLst>
+                                        <p:tav tm="0">
+                                          <p:val>
+                                            <p:strVal val="#ppt_y+.1"/>
+                                          </p:val>
+                                        </p:tav>
+                                        <p:tav tm="100000">
+                                          <p:val>
+                                            <p:strVal val="#ppt_y"/>
+                                          </p:val>
+                                        </p:tav>
+                                      </p:tavLst>
+                                    </p:anim>
+                                  </p:childTnLst>
+                                </p:cTn>
+                              </p:par>
+                            </p:childTnLst>
+                          </p:cTn>
+                        </p:par>
+                      </p:childTnLst>
+                    </p:cTn>
+                  </p:par>
+                  <p:par>
+                    <p:cTn id="62" fill="hold">
+                      <p:stCondLst>
+                        <p:cond delay="indefinite"/>
+                      </p:stCondLst>
+                      <p:childTnLst>
+                        <p:par>
+                          <p:cTn id="63" fill="hold">
+                            <p:stCondLst>
+                              <p:cond delay="0"/>
+                            </p:stCondLst>
+                            <p:childTnLst>
+                              <p:par>
+                                <p:cTn id="64" presetID="42" presetClass="entr" presetSubtype="0" fill="hold" grpId="0" nodeType="clickEffect">
+                                  <p:stCondLst>
+                                    <p:cond delay="0"/>
+                                  </p:stCondLst>
+                                  <p:childTnLst>
+                                    <p:set>
+                                      <p:cBhvr>
+                                        <p:cTn id="65" dur="1" fill="hold">
+                                          <p:stCondLst>
+                                            <p:cond delay="0"/>
+                                          </p:stCondLst>
+                                        </p:cTn>
+                                        <p:tgtEl>
+                                          <p:spTgt spid="18"/>
+                                        </p:tgtEl>
+                                        <p:attrNameLst>
+                                          <p:attrName>style.visibility</p:attrName>
+                                        </p:attrNameLst>
+                                      </p:cBhvr>
+                                      <p:to>
+                                        <p:strVal val="visible"/>
+                                      </p:to>
+                                    </p:set>
+                                    <p:animEffect transition="in" filter="fade">
+                                      <p:cBhvr>
+                                        <p:cTn id="66" dur="500"/>
+                                        <p:tgtEl>
+                                          <p:spTgt spid="18"/>
+                                        </p:tgtEl>
+                                      </p:cBhvr>
+                                    </p:animEffect>
+                                    <p:anim calcmode="lin" valueType="num">
+                                      <p:cBhvr>
+                                        <p:cTn id="67" dur="500" fill="hold"/>
+                                        <p:tgtEl>
+                                          <p:spTgt spid="18"/>
+                                        </p:tgtEl>
+                                        <p:attrNameLst>
+                                          <p:attrName>ppt_x</p:attrName>
+                                        </p:attrNameLst>
+                                      </p:cBhvr>
+                                      <p:tavLst>
+                                        <p:tav tm="0">
+                                          <p:val>
+                                            <p:strVal val="#ppt_x"/>
+                                          </p:val>
+                                        </p:tav>
+                                        <p:tav tm="100000">
+                                          <p:val>
+                                            <p:strVal val="#ppt_x"/>
+                                          </p:val>
+                                        </p:tav>
+                                      </p:tavLst>
+                                    </p:anim>
+                                    <p:anim calcmode="lin" valueType="num">
+                                      <p:cBhvr>
+                                        <p:cTn id="68" dur="500" fill="hold"/>
+                                        <p:tgtEl>
+                                          <p:spTgt spid="18"/>
+                                        </p:tgtEl>
+                                        <p:attrNameLst>
+                                          <p:attrName>ppt_y</p:attrName>
+                                        </p:attrNameLst>
+                                      </p:cBhvr>
+                                      <p:tavLst>
+                                        <p:tav tm="0">
+                                          <p:val>
+                                            <p:strVal val="#ppt_y+.1"/>
+                                          </p:val>
+                                        </p:tav>
+                                        <p:tav tm="100000">
+                                          <p:val>
+                                            <p:strVal val="#ppt_y"/>
+                                          </p:val>
+                                        </p:tav>
+                                      </p:tavLst>
+                                    </p:anim>
+                                  </p:childTnLst>
+                                </p:cTn>
+                              </p:par>
+                            </p:childTnLst>
+                          </p:cTn>
+                        </p:par>
+                      </p:childTnLst>
+                    </p:cTn>
+                  </p:par>
+                  <p:par>
+                    <p:cTn id="69" fill="hold">
+                      <p:stCondLst>
+                        <p:cond delay="indefinite"/>
+                      </p:stCondLst>
+                      <p:childTnLst>
+                        <p:par>
+                          <p:cTn id="70" fill="hold">
+                            <p:stCondLst>
+                              <p:cond delay="0"/>
+                            </p:stCondLst>
+                            <p:childTnLst>
+                              <p:par>
+                                <p:cTn id="71" presetID="26" presetClass="emph" presetSubtype="0" fill="hold" grpId="0" nodeType="clickEffect">
+                                  <p:stCondLst>
+                                    <p:cond delay="0"/>
+                                  </p:stCondLst>
+                                  <p:childTnLst>
+                                    <p:animEffect transition="out" filter="fade">
+                                      <p:cBhvr>
+                                        <p:cTn id="72" dur="1000" tmFilter="0, 0; .2, .5; .8, .5; 1, 0"/>
+                                        <p:tgtEl>
+                                          <p:spTgt spid="6"/>
+                                        </p:tgtEl>
+                                      </p:cBhvr>
+                                    </p:animEffect>
+                                    <p:animScale>
+                                      <p:cBhvr>
+                                        <p:cTn id="73" dur="500" autoRev="1" fill="hold"/>
+                                        <p:tgtEl>
+                                          <p:spTgt spid="6"/>
+                                        </p:tgtEl>
+                                      </p:cBhvr>
+                                      <p:by x="105000" y="105000"/>
+                                    </p:animScale>
+                                  </p:childTnLst>
+                                </p:cTn>
+                              </p:par>
+                            </p:childTnLst>
+                          </p:cTn>
+                        </p:par>
+                      </p:childTnLst>
+                    </p:cTn>
+                  </p:par>
+                  <p:par>
+                    <p:cTn id="74" fill="hold">
+                      <p:stCondLst>
+                        <p:cond delay="indefinite"/>
+                      </p:stCondLst>
+                      <p:childTnLst>
+                        <p:par>
+                          <p:cTn id="75" fill="hold">
+                            <p:stCondLst>
+                              <p:cond delay="0"/>
+                            </p:stCondLst>
+                            <p:childTnLst>
+                              <p:par>
+                                <p:cTn id="76" presetID="42" presetClass="exit" presetSubtype="0" fill="hold" grpId="1" nodeType="clickEffect">
+                                  <p:stCondLst>
+                                    <p:cond delay="0"/>
+                                  </p:stCondLst>
+                                  <p:childTnLst>
+                                    <p:animEffect transition="out" filter="fade">
+                                      <p:cBhvr>
+                                        <p:cTn id="77" dur="500"/>
+                                        <p:tgtEl>
+                                          <p:spTgt spid="6"/>
+                                        </p:tgtEl>
+                                      </p:cBhvr>
+                                    </p:animEffect>
+                                    <p:anim calcmode="lin" valueType="num">
+                                      <p:cBhvr>
+                                        <p:cTn id="78" dur="500"/>
+                                        <p:tgtEl>
+                                          <p:spTgt spid="6"/>
+                                        </p:tgtEl>
+                                        <p:attrNameLst>
+                                          <p:attrName>ppt_x</p:attrName>
+                                        </p:attrNameLst>
+                                      </p:cBhvr>
+                                      <p:tavLst>
+                                        <p:tav tm="0">
+                                          <p:val>
+                                            <p:strVal val="ppt_x"/>
+                                          </p:val>
+                                        </p:tav>
+                                        <p:tav tm="100000">
+                                          <p:val>
+                                            <p:strVal val="ppt_x"/>
+                                          </p:val>
+                                        </p:tav>
+                                      </p:tavLst>
+                                    </p:anim>
+                                    <p:anim calcmode="lin" valueType="num">
+                                      <p:cBhvr>
+                                        <p:cTn id="79" dur="500"/>
+                                        <p:tgtEl>
+                                          <p:spTgt spid="6"/>
+                                        </p:tgtEl>
+                                        <p:attrNameLst>
+                                          <p:attrName>ppt_y</p:attrName>
+                                        </p:attrNameLst>
+                                      </p:cBhvr>
+                                      <p:tavLst>
+                                        <p:tav tm="0">
+                                          <p:val>
+                                            <p:strVal val="ppt_y"/>
+                                          </p:val>
+                                        </p:tav>
+                                        <p:tav tm="100000">
+                                          <p:val>
+                                            <p:strVal val="ppt_y+.1"/>
+                                          </p:val>
+                                        </p:tav>
+                                      </p:tavLst>
+                                    </p:anim>
+                                    <p:set>
+                                      <p:cBhvr>
+                                        <p:cTn id="80" dur="1" fill="hold">
+                                          <p:stCondLst>
+                                            <p:cond delay="499"/>
+                                          </p:stCondLst>
+                                        </p:cTn>
+                                        <p:tgtEl>
+                                          <p:spTgt spid="6"/>
+                                        </p:tgtEl>
+                                        <p:attrNameLst>
+                                          <p:attrName>style.visibility</p:attrName>
+                                        </p:attrNameLst>
+                                      </p:cBhvr>
+                                      <p:to>
+                                        <p:strVal val="hidden"/>
+                                      </p:to>
+                                    </p:set>
+                                  </p:childTnLst>
+                                </p:cTn>
+                              </p:par>
+                            </p:childTnLst>
+                          </p:cTn>
+                        </p:par>
+                      </p:childTnLst>
+                    </p:cTn>
+                  </p:par>
+                  <p:par>
+                    <p:cTn id="81" fill="hold">
+                      <p:stCondLst>
+                        <p:cond delay="indefinite"/>
+                      </p:stCondLst>
+                      <p:childTnLst>
+                        <p:par>
+                          <p:cTn id="82" fill="hold">
+                            <p:stCondLst>
+                              <p:cond delay="0"/>
+                            </p:stCondLst>
+                            <p:childTnLst>
+                              <p:par>
+                                <p:cTn id="83" presetID="42" presetClass="entr" presetSubtype="0" fill="hold" grpId="0" nodeType="clickEffect">
+                                  <p:stCondLst>
+                                    <p:cond delay="0"/>
+                                  </p:stCondLst>
+                                  <p:childTnLst>
+                                    <p:set>
+                                      <p:cBhvr>
+                                        <p:cTn id="84" dur="1" fill="hold">
+                                          <p:stCondLst>
+                                            <p:cond delay="0"/>
+                                          </p:stCondLst>
+                                        </p:cTn>
+                                        <p:tgtEl>
+                                          <p:spTgt spid="19"/>
+                                        </p:tgtEl>
+                                        <p:attrNameLst>
+                                          <p:attrName>style.visibility</p:attrName>
+                                        </p:attrNameLst>
+                                      </p:cBhvr>
+                                      <p:to>
+                                        <p:strVal val="visible"/>
+                                      </p:to>
+                                    </p:set>
+                                    <p:animEffect transition="in" filter="fade">
+                                      <p:cBhvr>
+                                        <p:cTn id="85" dur="500"/>
+                                        <p:tgtEl>
+                                          <p:spTgt spid="19"/>
+                                        </p:tgtEl>
+                                      </p:cBhvr>
+                                    </p:animEffect>
+                                    <p:anim calcmode="lin" valueType="num">
+                                      <p:cBhvr>
+                                        <p:cTn id="86" dur="500" fill="hold"/>
+                                        <p:tgtEl>
+                                          <p:spTgt spid="19"/>
+                                        </p:tgtEl>
+                                        <p:attrNameLst>
+                                          <p:attrName>ppt_x</p:attrName>
+                                        </p:attrNameLst>
+                                      </p:cBhvr>
+                                      <p:tavLst>
+                                        <p:tav tm="0">
+                                          <p:val>
+                                            <p:strVal val="#ppt_x"/>
+                                          </p:val>
+                                        </p:tav>
+                                        <p:tav tm="100000">
+                                          <p:val>
+                                            <p:strVal val="#ppt_x"/>
+                                          </p:val>
+                                        </p:tav>
+                                      </p:tavLst>
+                                    </p:anim>
+                                    <p:anim calcmode="lin" valueType="num">
+                                      <p:cBhvr>
+                                        <p:cTn id="87" dur="500" fill="hold"/>
+                                        <p:tgtEl>
+                                          <p:spTgt spid="19"/>
+                                        </p:tgtEl>
+                                        <p:attrNameLst>
+                                          <p:attrName>ppt_y</p:attrName>
+                                        </p:attrNameLst>
+                                      </p:cBhvr>
+                                      <p:tavLst>
+                                        <p:tav tm="0">
+                                          <p:val>
+                                            <p:strVal val="#ppt_y+.1"/>
+                                          </p:val>
+                                        </p:tav>
+                                        <p:tav tm="100000">
+                                          <p:val>
+                                            <p:strVal val="#ppt_y"/>
+                                          </p:val>
+                                        </p:tav>
+                                      </p:tavLst>
+                                    </p:anim>
+                                  </p:childTnLst>
+                                </p:cTn>
+                              </p:par>
+                            </p:childTnLst>
+                          </p:cTn>
+                        </p:par>
+                      </p:childTnLst>
+                    </p:cTn>
+                  </p:par>
+                </p:childTnLst>
+              </p:cTn>
+              <p:prevCondLst>
+                <p:cond evt="onPrev" delay="0">
+                  <p:tgtEl>
+                    <p:sldTgt/>
+                  </p:tgtEl>
+                </p:cond>
+              </p:prevCondLst>
+              <p:nextCondLst>
+                <p:cond evt="onNext" delay="0">
+                  <p:tgtEl>
+                    <p:sldTgt/>
+                  </p:tgtEl>
+                </p:cond>
+              </p:nextCondLst>
+            </p:seq>
+          </p:childTnLst>
+        </p:cTn>
+      </p:par>
+    </p:tnLst>
+    <p:bldLst>
+      <p:bldP spid="5" grpId="0" animBg="1"/>
+      <p:bldP spid="5" grpId="1" animBg="1"/>
+      <p:bldP spid="6" grpId="0" animBg="1"/>
+      <p:bldP spid="6" grpId="1" animBg="1"/>
+      <p:bldP spid="7" grpId="0" animBg="1"/>
+      <p:bldP spid="7" grpId="1" animBg="1"/>
+      <p:bldP spid="8" grpId="0" animBg="1"/>
+      <p:bldP spid="14" grpId="0" animBg="1"/>
+      <p:bldP spid="15" grpId="0" animBg="1"/>
+      <p:bldP spid="15" grpId="1" animBg="1"/>
+      <p:bldP spid="17" grpId="0" animBg="1"/>
+      <p:bldP spid="18" grpId="0" animBg="1"/>
+      <p:bldP spid="19" grpId="0" animBg="1"/>
+    </p:bldLst>
+  </p:timing>
+</p:sld>
+</file>
+
+<file path=ppt/slides/slide4.xml><?xml version="1.0" encoding="utf-8"?>
+<p:sld xmlns:a="http://schemas.openxmlformats.org/drawingml/2006/main" xmlns:r="http://schemas.openxmlformats.org/officeDocument/2006/relationships" xmlns:p="http://schemas.openxmlformats.org/presentationml/2006/main">
+  <p:cSld>
+    <p:spTree>
+      <p:nvGrpSpPr>
+        <p:cNvPr id="1" name=""/>
+        <p:cNvGrpSpPr/>
+        <p:nvPr/>
+      </p:nvGrpSpPr>
+      <p:grpSpPr>
+        <a:xfrm>
+          <a:off x="0" y="0"/>
+          <a:ext cx="0" cy="0"/>
+          <a:chOff x="0" y="0"/>
+          <a:chExt cx="0" cy="0"/>
+        </a:xfrm>
+      </p:grpSpPr>
+      <p:sp>
+        <p:nvSpPr>
+          <p:cNvPr id="2" name="タイトル 1">
+            <a:extLst>
+              <a:ext uri="{FF2B5EF4-FFF2-40B4-BE49-F238E27FC236}">
+                <a16:creationId xmlns:a16="http://schemas.microsoft.com/office/drawing/2014/main" id="{77AC1711-761E-C186-0FDC-20AB1C689EB1}"/>
+              </a:ext>
+            </a:extLst>
+          </p:cNvPr>
+          <p:cNvSpPr>
+            <a:spLocks noGrp="1"/>
+          </p:cNvSpPr>
+          <p:nvPr>
+            <p:ph type="title"/>
+          </p:nvPr>
+        </p:nvSpPr>
+        <p:spPr/>
+        <p:txBody>
+          <a:bodyPr/>
+          <a:lstStyle/>
+          <a:p>
+            <a:r>
+              <a:rPr lang="ja-JP" altLang="en-US" dirty="0"/>
+              <a:t>プログラム</a:t>
+            </a:r>
+            <a:endParaRPr kumimoji="1" lang="ja-JP" altLang="en-US" dirty="0"/>
+          </a:p>
+        </p:txBody>
+      </p:sp>
+      <p:pic>
+        <p:nvPicPr>
+          <p:cNvPr id="5" name="コンテンツ プレースホルダー 4">
+            <a:extLst>
+              <a:ext uri="{FF2B5EF4-FFF2-40B4-BE49-F238E27FC236}">
+                <a16:creationId xmlns:a16="http://schemas.microsoft.com/office/drawing/2014/main" id="{51DE195B-8F3C-6CEC-1A2D-733FB2FFEBBE}"/>
+              </a:ext>
+            </a:extLst>
+          </p:cNvPr>
+          <p:cNvPicPr>
+            <a:picLocks noGrp="1" noChangeAspect="1"/>
+          </p:cNvPicPr>
+          <p:nvPr>
+            <p:ph idx="1"/>
+          </p:nvPr>
+        </p:nvPicPr>
+        <p:blipFill>
+          <a:blip r:embed="rId2"/>
+          <a:stretch>
+            <a:fillRect/>
+          </a:stretch>
+        </p:blipFill>
+        <p:spPr>
+          <a:xfrm>
+            <a:off x="1355034" y="1804194"/>
+            <a:ext cx="7132335" cy="4351338"/>
+          </a:xfrm>
+        </p:spPr>
+      </p:pic>
+    </p:spTree>
+    <p:extLst>
+      <p:ext uri="{BB962C8B-B14F-4D97-AF65-F5344CB8AC3E}">
+        <p14:creationId xmlns:p14="http://schemas.microsoft.com/office/powerpoint/2010/main" val="3565487975"/>
+      </p:ext>
+    </p:extLst>
+  </p:cSld>
+  <p:clrMapOvr>
+    <a:masterClrMapping/>
+  </p:clrMapOvr>
+</p:sld>
+</file>
+
+<file path=ppt/slides/slide5.xml><?xml version="1.0" encoding="utf-8"?>
+<p:sld xmlns:a="http://schemas.openxmlformats.org/drawingml/2006/main" xmlns:r="http://schemas.openxmlformats.org/officeDocument/2006/relationships" xmlns:p="http://schemas.openxmlformats.org/presentationml/2006/main">
+  <p:cSld>
+    <p:spTree>
+      <p:nvGrpSpPr>
+        <p:cNvPr id="1" name=""/>
+        <p:cNvGrpSpPr/>
+        <p:nvPr/>
+      </p:nvGrpSpPr>
+      <p:grpSpPr>
+        <a:xfrm>
+          <a:off x="0" y="0"/>
+          <a:ext cx="0" cy="0"/>
+          <a:chOff x="0" y="0"/>
+          <a:chExt cx="0" cy="0"/>
+        </a:xfrm>
+      </p:grpSpPr>
+      <p:sp>
+        <p:nvSpPr>
+          <p:cNvPr id="2" name="タイトル 1">
+            <a:extLst>
+              <a:ext uri="{FF2B5EF4-FFF2-40B4-BE49-F238E27FC236}">
+                <a16:creationId xmlns:a16="http://schemas.microsoft.com/office/drawing/2014/main" id="{CC391346-71B2-AC46-83DF-4C652F537680}"/>
+              </a:ext>
+            </a:extLst>
+          </p:cNvPr>
+          <p:cNvSpPr>
+            <a:spLocks noGrp="1"/>
+          </p:cNvSpPr>
+          <p:nvPr>
+            <p:ph type="title"/>
+          </p:nvPr>
+        </p:nvSpPr>
+        <p:spPr/>
+        <p:txBody>
+          <a:bodyPr/>
+          <a:lstStyle/>
+          <a:p>
+            <a:r>
+              <a:rPr kumimoji="1" lang="ja-JP" altLang="en-US" dirty="0"/>
+              <a:t>ポイント</a:t>
+            </a:r>
+          </a:p>
+        </p:txBody>
+      </p:sp>
+      <mc:AlternateContent xmlns:mc="http://schemas.openxmlformats.org/markup-compatibility/2006">
+        <mc:Choice xmlns:a14="http://schemas.microsoft.com/office/drawing/2010/main" Requires="a14">
+          <p:sp>
+            <p:nvSpPr>
+              <p:cNvPr id="3" name="コンテンツ プレースホルダー 2">
+                <a:extLst>
+                  <a:ext uri="{FF2B5EF4-FFF2-40B4-BE49-F238E27FC236}">
+                    <a16:creationId xmlns:a16="http://schemas.microsoft.com/office/drawing/2014/main" id="{4C368A42-B238-C93A-F50B-2A313E558FAE}"/>
+                  </a:ext>
+                </a:extLst>
+              </p:cNvPr>
+              <p:cNvSpPr>
+                <a:spLocks noGrp="1"/>
+              </p:cNvSpPr>
+              <p:nvPr>
+                <p:ph idx="1"/>
+              </p:nvPr>
+            </p:nvSpPr>
+            <p:spPr/>
+            <p:txBody>
+              <a:bodyPr/>
+              <a:lstStyle/>
+              <a:p>
+                <a:r>
+                  <a:rPr kumimoji="1" lang="ja-JP" altLang="en-US" dirty="0"/>
+                  <a:t>全ての順列が等確率で生成される</a:t>
+                </a:r>
+                <a:endParaRPr kumimoji="1" lang="en-US" altLang="ja-JP" dirty="0"/>
+              </a:p>
+              <a:p>
+                <a:pPr marL="0" indent="0">
+                  <a:buNone/>
+                </a:pPr>
+                <a:endParaRPr kumimoji="1" lang="en-US" altLang="ja-JP" sz="1000" dirty="0"/>
+              </a:p>
+              <a:p>
+                <a:pPr lvl="1">
+                  <a:buFont typeface="Wingdings" panose="05000000000000000000" pitchFamily="2" charset="2"/>
+                  <a:buChar char="ü"/>
+                </a:pPr>
+                <a:r>
+                  <a:rPr kumimoji="1" lang="ja-JP" altLang="en-US" dirty="0"/>
+                  <a:t>生成可能な順列数は </a:t>
+                </a:r>
+                <a14:m>
+                  <m:oMath xmlns:m="http://schemas.openxmlformats.org/officeDocument/2006/math">
+                    <m:r>
+                      <a:rPr kumimoji="1" lang="en-US" altLang="ja-JP" sz="2800" b="0" i="1" smtClean="0">
+                        <a:latin typeface="Cambria Math" panose="02040503050406030204" pitchFamily="18" charset="0"/>
+                      </a:rPr>
+                      <m:t>𝑛</m:t>
+                    </m:r>
+                    <m:r>
+                      <a:rPr kumimoji="1" lang="en-US" altLang="ja-JP" sz="2800" b="0" i="1" smtClean="0">
+                        <a:latin typeface="Cambria Math" panose="02040503050406030204" pitchFamily="18" charset="0"/>
+                      </a:rPr>
+                      <m:t>!</m:t>
+                    </m:r>
+                  </m:oMath>
+                </a14:m>
+                <a:r>
+                  <a:rPr kumimoji="1" lang="en-US" altLang="ja-JP" sz="2800" dirty="0"/>
+                  <a:t> </a:t>
+                </a:r>
+                <a:r>
+                  <a:rPr kumimoji="1" lang="ja-JP" altLang="en-US" dirty="0"/>
+                  <a:t>通り</a:t>
+                </a:r>
+                <a:endParaRPr kumimoji="1" lang="en-US" altLang="ja-JP" dirty="0"/>
+              </a:p>
+              <a:p>
+                <a:pPr lvl="1">
+                  <a:buFont typeface="Wingdings" panose="05000000000000000000" pitchFamily="2" charset="2"/>
+                  <a:buChar char="ü"/>
+                </a:pPr>
+                <a:endParaRPr kumimoji="1" lang="en-US" altLang="ja-JP" sz="800" dirty="0"/>
+              </a:p>
+              <a:p>
+                <a:pPr lvl="1">
+                  <a:buFont typeface="Wingdings" panose="05000000000000000000" pitchFamily="2" charset="2"/>
+                  <a:buChar char="ü"/>
+                </a:pPr>
+                <a:r>
+                  <a:rPr lang="en-US" altLang="ja-JP" dirty="0"/>
+                  <a:t>1</a:t>
+                </a:r>
+                <a:r>
+                  <a:rPr lang="ja-JP" altLang="en-US" dirty="0"/>
+                  <a:t>順列が生成される確率は </a:t>
+                </a:r>
+                <a14:m>
+                  <m:oMath xmlns:m="http://schemas.openxmlformats.org/officeDocument/2006/math">
+                    <m:r>
+                      <a:rPr lang="en-US" altLang="ja-JP" sz="2800" b="0" i="1" smtClean="0">
+                        <a:latin typeface="Cambria Math" panose="02040503050406030204" pitchFamily="18" charset="0"/>
+                      </a:rPr>
+                      <m:t>𝑃</m:t>
+                    </m:r>
+                    <m:r>
+                      <a:rPr lang="en-US" altLang="ja-JP" sz="2800" b="0" i="1" smtClean="0">
+                        <a:latin typeface="Cambria Math" panose="02040503050406030204" pitchFamily="18" charset="0"/>
+                      </a:rPr>
+                      <m:t>=</m:t>
+                    </m:r>
+                    <m:f>
+                      <m:fPr>
+                        <m:ctrlPr>
+                          <a:rPr lang="en-US" altLang="ja-JP" sz="2800" b="0" i="1" smtClean="0">
+                            <a:latin typeface="Cambria Math" panose="02040503050406030204" pitchFamily="18" charset="0"/>
+                          </a:rPr>
+                        </m:ctrlPr>
+                      </m:fPr>
+                      <m:num>
+                        <m:r>
+                          <a:rPr lang="en-US" altLang="ja-JP" sz="2800" b="0" i="1" smtClean="0">
+                            <a:latin typeface="Cambria Math" panose="02040503050406030204" pitchFamily="18" charset="0"/>
+                          </a:rPr>
+                          <m:t>1</m:t>
+                        </m:r>
+                      </m:num>
+                      <m:den>
+                        <m:r>
+                          <a:rPr lang="en-US" altLang="ja-JP" sz="2800" b="0" i="1" smtClean="0">
+                            <a:latin typeface="Cambria Math" panose="02040503050406030204" pitchFamily="18" charset="0"/>
+                          </a:rPr>
+                          <m:t>𝑛</m:t>
+                        </m:r>
+                      </m:den>
+                    </m:f>
+                    <m:r>
+                      <a:rPr lang="en-US" altLang="ja-JP" sz="2800" b="0" i="1" smtClean="0">
+                        <a:latin typeface="Cambria Math" panose="02040503050406030204" pitchFamily="18" charset="0"/>
+                      </a:rPr>
+                      <m:t>×</m:t>
+                    </m:r>
+                    <m:f>
+                      <m:fPr>
+                        <m:ctrlPr>
+                          <a:rPr lang="en-US" altLang="ja-JP" sz="2800" b="0" i="1" smtClean="0">
+                            <a:latin typeface="Cambria Math" panose="02040503050406030204" pitchFamily="18" charset="0"/>
+                          </a:rPr>
+                        </m:ctrlPr>
+                      </m:fPr>
+                      <m:num>
+                        <m:r>
+                          <a:rPr lang="en-US" altLang="ja-JP" sz="2800" b="0" i="1" smtClean="0">
+                            <a:latin typeface="Cambria Math" panose="02040503050406030204" pitchFamily="18" charset="0"/>
+                          </a:rPr>
+                          <m:t>1</m:t>
+                        </m:r>
+                      </m:num>
+                      <m:den>
+                        <m:r>
+                          <a:rPr lang="en-US" altLang="ja-JP" sz="2800" b="0" i="1" smtClean="0">
+                            <a:latin typeface="Cambria Math" panose="02040503050406030204" pitchFamily="18" charset="0"/>
+                          </a:rPr>
+                          <m:t>𝑛</m:t>
+                        </m:r>
+                        <m:r>
+                          <a:rPr lang="en-US" altLang="ja-JP" sz="2800" b="0" i="1" smtClean="0">
+                            <a:latin typeface="Cambria Math" panose="02040503050406030204" pitchFamily="18" charset="0"/>
+                          </a:rPr>
+                          <m:t>−1</m:t>
+                        </m:r>
+                      </m:den>
+                    </m:f>
+                    <m:r>
+                      <a:rPr lang="en-US" altLang="ja-JP" sz="2800" b="0" i="1" smtClean="0">
+                        <a:latin typeface="Cambria Math" panose="02040503050406030204" pitchFamily="18" charset="0"/>
+                      </a:rPr>
+                      <m:t>×…×</m:t>
+                    </m:r>
+                    <m:f>
+                      <m:fPr>
+                        <m:ctrlPr>
+                          <a:rPr lang="en-US" altLang="ja-JP" sz="2800" b="0" i="1" smtClean="0">
+                            <a:latin typeface="Cambria Math" panose="02040503050406030204" pitchFamily="18" charset="0"/>
+                          </a:rPr>
+                        </m:ctrlPr>
+                      </m:fPr>
+                      <m:num>
+                        <m:r>
+                          <a:rPr lang="en-US" altLang="ja-JP" sz="2800" b="0" i="1" smtClean="0">
+                            <a:latin typeface="Cambria Math" panose="02040503050406030204" pitchFamily="18" charset="0"/>
+                          </a:rPr>
+                          <m:t>1</m:t>
+                        </m:r>
+                      </m:num>
+                      <m:den>
+                        <m:r>
+                          <a:rPr lang="en-US" altLang="ja-JP" sz="2800" b="0" i="1" smtClean="0">
+                            <a:latin typeface="Cambria Math" panose="02040503050406030204" pitchFamily="18" charset="0"/>
+                          </a:rPr>
+                          <m:t>2</m:t>
+                        </m:r>
+                      </m:den>
+                    </m:f>
+                    <m:r>
+                      <a:rPr lang="en-US" altLang="ja-JP" sz="2800" b="0" i="1" smtClean="0">
+                        <a:latin typeface="Cambria Math" panose="02040503050406030204" pitchFamily="18" charset="0"/>
+                      </a:rPr>
+                      <m:t>×1=</m:t>
+                    </m:r>
+                    <m:f>
+                      <m:fPr>
+                        <m:ctrlPr>
+                          <a:rPr lang="en-US" altLang="ja-JP" sz="2800" b="0" i="1" smtClean="0">
+                            <a:latin typeface="Cambria Math" panose="02040503050406030204" pitchFamily="18" charset="0"/>
+                          </a:rPr>
+                        </m:ctrlPr>
+                      </m:fPr>
+                      <m:num>
+                        <m:r>
+                          <a:rPr lang="en-US" altLang="ja-JP" sz="2800" b="0" i="1" smtClean="0">
+                            <a:latin typeface="Cambria Math" panose="02040503050406030204" pitchFamily="18" charset="0"/>
+                          </a:rPr>
+                          <m:t>1</m:t>
+                        </m:r>
+                      </m:num>
+                      <m:den>
+                        <m:r>
+                          <a:rPr lang="en-US" altLang="ja-JP" sz="2800" b="0" i="1" smtClean="0">
+                            <a:latin typeface="Cambria Math" panose="02040503050406030204" pitchFamily="18" charset="0"/>
+                          </a:rPr>
+                          <m:t>𝑛</m:t>
+                        </m:r>
+                        <m:r>
+                          <a:rPr lang="en-US" altLang="ja-JP" sz="2800" b="0" i="1" smtClean="0">
+                            <a:latin typeface="Cambria Math" panose="02040503050406030204" pitchFamily="18" charset="0"/>
+                          </a:rPr>
+                          <m:t>!</m:t>
+                        </m:r>
+                      </m:den>
+                    </m:f>
+                  </m:oMath>
+                </a14:m>
+                <a:endParaRPr kumimoji="1" lang="en-US" altLang="ja-JP" dirty="0"/>
+              </a:p>
+              <a:p>
+                <a:pPr lvl="1">
+                  <a:buFont typeface="Wingdings" panose="05000000000000000000" pitchFamily="2" charset="2"/>
+                  <a:buChar char="ü"/>
+                </a:pPr>
+                <a:endParaRPr kumimoji="1" lang="en-US" altLang="ja-JP" sz="800" dirty="0"/>
+              </a:p>
+              <a:p>
+                <a:pPr lvl="1">
+                  <a:buFont typeface="Wingdings" panose="05000000000000000000" pitchFamily="2" charset="2"/>
+                  <a:buChar char="ü"/>
+                </a:pPr>
+                <a:r>
+                  <a:rPr lang="ja-JP" altLang="en-US" dirty="0"/>
+                  <a:t>選ばれた要素は</a:t>
+                </a:r>
+                <a:r>
+                  <a:rPr kumimoji="1" lang="ja-JP" altLang="en-US" dirty="0"/>
+                  <a:t>再抽選されない ⇒ 一意性</a:t>
+                </a:r>
+                <a:endParaRPr kumimoji="1" lang="en-US" altLang="ja-JP" dirty="0"/>
+              </a:p>
+              <a:p>
+                <a:pPr marL="457200" lvl="1" indent="0">
+                  <a:buNone/>
+                </a:pPr>
+                <a:r>
+                  <a:rPr lang="ja-JP" altLang="en-US" dirty="0"/>
+                  <a:t>　　</a:t>
+                </a:r>
+                <a:endParaRPr kumimoji="1" lang="en-US" altLang="ja-JP" dirty="0"/>
+              </a:p>
+            </p:txBody>
+          </p:sp>
+        </mc:Choice>
+        <mc:Fallback>
+          <p:sp>
+            <p:nvSpPr>
+              <p:cNvPr id="3" name="コンテンツ プレースホルダー 2">
+                <a:extLst>
+                  <a:ext uri="{FF2B5EF4-FFF2-40B4-BE49-F238E27FC236}">
+                    <a16:creationId xmlns:a16="http://schemas.microsoft.com/office/drawing/2014/main" id="{4C368A42-B238-C93A-F50B-2A313E558FAE}"/>
+                  </a:ext>
+                </a:extLst>
+              </p:cNvPr>
+              <p:cNvSpPr>
+                <a:spLocks noGrp="1" noRot="1" noChangeAspect="1" noMove="1" noResize="1" noEditPoints="1" noAdjustHandles="1" noChangeArrowheads="1" noChangeShapeType="1" noTextEdit="1"/>
+              </p:cNvSpPr>
+              <p:nvPr>
+                <p:ph idx="1"/>
+              </p:nvPr>
+            </p:nvSpPr>
+            <p:spPr>
+              <a:blipFill>
+                <a:blip r:embed="rId2"/>
+                <a:stretch>
+                  <a:fillRect l="-1043" t="-2525"/>
+                </a:stretch>
+              </a:blipFill>
+            </p:spPr>
+            <p:txBody>
+              <a:bodyPr/>
+              <a:lstStyle/>
+              <a:p>
+                <a:r>
+                  <a:rPr lang="ja-JP" altLang="en-US">
+                    <a:noFill/>
+                  </a:rPr>
+                  <a:t> </a:t>
+                </a:r>
+              </a:p>
+            </p:txBody>
+          </p:sp>
+        </mc:Fallback>
+      </mc:AlternateContent>
+    </p:spTree>
+    <p:extLst>
+      <p:ext uri="{BB962C8B-B14F-4D97-AF65-F5344CB8AC3E}">
+        <p14:creationId xmlns:p14="http://schemas.microsoft.com/office/powerpoint/2010/main" val="724812258"/>
+      </p:ext>
+    </p:extLst>
+  </p:cSld>
+  <p:clrMapOvr>
+    <a:masterClrMapping/>
+  </p:clrMapOvr>
+</p:sld>
+</file>
+
+<file path=ppt/slides/slide6.xml><?xml version="1.0" encoding="utf-8"?>
+<p:sld xmlns:a="http://schemas.openxmlformats.org/drawingml/2006/main" xmlns:r="http://schemas.openxmlformats.org/officeDocument/2006/relationships" xmlns:p="http://schemas.openxmlformats.org/presentationml/2006/main">
+  <p:cSld>
+    <p:spTree>
+      <p:nvGrpSpPr>
+        <p:cNvPr id="1" name=""/>
+        <p:cNvGrpSpPr/>
+        <p:nvPr/>
+      </p:nvGrpSpPr>
+      <p:grpSpPr>
+        <a:xfrm>
+          <a:off x="0" y="0"/>
+          <a:ext cx="0" cy="0"/>
+          <a:chOff x="0" y="0"/>
+          <a:chExt cx="0" cy="0"/>
+        </a:xfrm>
+      </p:grpSpPr>
+      <p:sp>
+        <p:nvSpPr>
+          <p:cNvPr id="2" name="タイトル 1">
+            <a:extLst>
+              <a:ext uri="{FF2B5EF4-FFF2-40B4-BE49-F238E27FC236}">
+                <a16:creationId xmlns:a16="http://schemas.microsoft.com/office/drawing/2014/main" id="{53AEE6E9-64F2-7C48-6E87-1AD2E5175AFB}"/>
+              </a:ext>
+            </a:extLst>
+          </p:cNvPr>
+          <p:cNvSpPr>
+            <a:spLocks noGrp="1"/>
+          </p:cNvSpPr>
+          <p:nvPr>
+            <p:ph type="title"/>
+          </p:nvPr>
+        </p:nvSpPr>
+        <p:spPr/>
+        <p:txBody>
+          <a:bodyPr/>
+          <a:lstStyle/>
+          <a:p>
+            <a:r>
+              <a:rPr kumimoji="1" lang="ja-JP" altLang="en-US" dirty="0"/>
+              <a:t>注意点</a:t>
+            </a:r>
+          </a:p>
+        </p:txBody>
+      </p:sp>
+      <p:sp>
+        <p:nvSpPr>
+          <p:cNvPr id="3" name="コンテンツ プレースホルダー 2">
+            <a:extLst>
+              <a:ext uri="{FF2B5EF4-FFF2-40B4-BE49-F238E27FC236}">
+                <a16:creationId xmlns:a16="http://schemas.microsoft.com/office/drawing/2014/main" id="{DF03F9A9-3CBA-9897-5F20-A879EC91F17B}"/>
+              </a:ext>
+            </a:extLst>
+          </p:cNvPr>
+          <p:cNvSpPr>
+            <a:spLocks noGrp="1"/>
+          </p:cNvSpPr>
+          <p:nvPr>
+            <p:ph idx="1"/>
+          </p:nvPr>
+        </p:nvSpPr>
+        <p:spPr/>
+        <p:txBody>
+          <a:bodyPr/>
+          <a:lstStyle/>
+          <a:p>
+            <a:r>
+              <a:rPr kumimoji="1" lang="ja-JP" altLang="en-US" dirty="0"/>
+              <a:t>「ランダムに選ぶ」のは難しい</a:t>
+            </a:r>
+            <a:endParaRPr kumimoji="1" lang="en-US" altLang="ja-JP" dirty="0"/>
+          </a:p>
+          <a:p>
+            <a:pPr marL="457200" lvl="1" indent="0">
+              <a:buNone/>
+            </a:pPr>
+            <a:r>
+              <a:rPr kumimoji="1" lang="ja-JP" altLang="en-US" sz="2800" dirty="0">
+                <a:latin typeface="Cica" panose="020B0409020203020207" pitchFamily="49" charset="-128"/>
+                <a:ea typeface="Cica" panose="020B0409020203020207" pitchFamily="49" charset="-128"/>
+              </a:rPr>
+              <a:t>疑</a:t>
+            </a:r>
+            <a:r>
+              <a:rPr kumimoji="1" lang="ja-JP" altLang="en-US" dirty="0"/>
+              <a:t>似乱数の</a:t>
+            </a:r>
+            <a:r>
+              <a:rPr kumimoji="1" lang="ja-JP" altLang="en-US"/>
+              <a:t>おはなし↓</a:t>
+            </a:r>
+            <a:r>
+              <a:rPr lang="ja-JP" altLang="en-US"/>
+              <a:t> ↓ ↓</a:t>
+            </a:r>
+            <a:endParaRPr kumimoji="1" lang="ja-JP" altLang="en-US" dirty="0"/>
+          </a:p>
+        </p:txBody>
+      </p:sp>
+    </p:spTree>
+    <p:extLst>
+      <p:ext uri="{BB962C8B-B14F-4D97-AF65-F5344CB8AC3E}">
+        <p14:creationId xmlns:p14="http://schemas.microsoft.com/office/powerpoint/2010/main" val="1440237636"/>
       </p:ext>
     </p:extLst>
   </p:cSld>

--- a/Fisher-Yates発表用.pptx
+++ b/Fisher-Yates発表用.pptx
@@ -11,6 +11,7 @@
     <p:sldId id="259" r:id="rId5"/>
     <p:sldId id="260" r:id="rId6"/>
     <p:sldId id="261" r:id="rId7"/>
+    <p:sldId id="262" r:id="rId8"/>
   </p:sldIdLst>
   <p:sldSz cx="12192000" cy="6858000"/>
   <p:notesSz cx="6858000" cy="9144000"/>
@@ -264,7 +265,7 @@
           <a:p>
             <a:fld id="{8EA3E408-0FCD-471E-8DC4-44F3A6A02DAE}" type="datetimeFigureOut">
               <a:rPr kumimoji="1" lang="ja-JP" altLang="en-US" smtClean="0"/>
-              <a:t>2025/7/22</a:t>
+              <a:t>2025/7/23</a:t>
             </a:fld>
             <a:endParaRPr kumimoji="1" lang="ja-JP" altLang="en-US"/>
           </a:p>
@@ -494,7 +495,7 @@
           <a:p>
             <a:fld id="{8EA3E408-0FCD-471E-8DC4-44F3A6A02DAE}" type="datetimeFigureOut">
               <a:rPr kumimoji="1" lang="ja-JP" altLang="en-US" smtClean="0"/>
-              <a:t>2025/7/22</a:t>
+              <a:t>2025/7/23</a:t>
             </a:fld>
             <a:endParaRPr kumimoji="1" lang="ja-JP" altLang="en-US"/>
           </a:p>
@@ -734,7 +735,7 @@
           <a:p>
             <a:fld id="{8EA3E408-0FCD-471E-8DC4-44F3A6A02DAE}" type="datetimeFigureOut">
               <a:rPr kumimoji="1" lang="ja-JP" altLang="en-US" smtClean="0"/>
-              <a:t>2025/7/22</a:t>
+              <a:t>2025/7/23</a:t>
             </a:fld>
             <a:endParaRPr kumimoji="1" lang="ja-JP" altLang="en-US"/>
           </a:p>
@@ -974,7 +975,7 @@
           <a:p>
             <a:fld id="{8EA3E408-0FCD-471E-8DC4-44F3A6A02DAE}" type="datetimeFigureOut">
               <a:rPr kumimoji="1" lang="ja-JP" altLang="en-US" smtClean="0"/>
-              <a:t>2025/7/22</a:t>
+              <a:t>2025/7/23</a:t>
             </a:fld>
             <a:endParaRPr kumimoji="1" lang="ja-JP" altLang="en-US"/>
           </a:p>
@@ -1249,7 +1250,7 @@
           <a:p>
             <a:fld id="{8EA3E408-0FCD-471E-8DC4-44F3A6A02DAE}" type="datetimeFigureOut">
               <a:rPr kumimoji="1" lang="ja-JP" altLang="en-US" smtClean="0"/>
-              <a:t>2025/7/22</a:t>
+              <a:t>2025/7/23</a:t>
             </a:fld>
             <a:endParaRPr kumimoji="1" lang="ja-JP" altLang="en-US"/>
           </a:p>
@@ -1578,7 +1579,7 @@
           <a:p>
             <a:fld id="{8EA3E408-0FCD-471E-8DC4-44F3A6A02DAE}" type="datetimeFigureOut">
               <a:rPr kumimoji="1" lang="ja-JP" altLang="en-US" smtClean="0"/>
-              <a:t>2025/7/22</a:t>
+              <a:t>2025/7/23</a:t>
             </a:fld>
             <a:endParaRPr kumimoji="1" lang="ja-JP" altLang="en-US"/>
           </a:p>
@@ -2054,7 +2055,7 @@
           <a:p>
             <a:fld id="{8EA3E408-0FCD-471E-8DC4-44F3A6A02DAE}" type="datetimeFigureOut">
               <a:rPr kumimoji="1" lang="ja-JP" altLang="en-US" smtClean="0"/>
-              <a:t>2025/7/22</a:t>
+              <a:t>2025/7/23</a:t>
             </a:fld>
             <a:endParaRPr kumimoji="1" lang="ja-JP" altLang="en-US"/>
           </a:p>
@@ -2195,7 +2196,7 @@
           <a:p>
             <a:fld id="{8EA3E408-0FCD-471E-8DC4-44F3A6A02DAE}" type="datetimeFigureOut">
               <a:rPr kumimoji="1" lang="ja-JP" altLang="en-US" smtClean="0"/>
-              <a:t>2025/7/22</a:t>
+              <a:t>2025/7/23</a:t>
             </a:fld>
             <a:endParaRPr kumimoji="1" lang="ja-JP" altLang="en-US"/>
           </a:p>
@@ -2308,7 +2309,7 @@
           <a:p>
             <a:fld id="{8EA3E408-0FCD-471E-8DC4-44F3A6A02DAE}" type="datetimeFigureOut">
               <a:rPr kumimoji="1" lang="ja-JP" altLang="en-US" smtClean="0"/>
-              <a:t>2025/7/22</a:t>
+              <a:t>2025/7/23</a:t>
             </a:fld>
             <a:endParaRPr kumimoji="1" lang="ja-JP" altLang="en-US"/>
           </a:p>
@@ -2651,7 +2652,7 @@
           <a:p>
             <a:fld id="{8EA3E408-0FCD-471E-8DC4-44F3A6A02DAE}" type="datetimeFigureOut">
               <a:rPr kumimoji="1" lang="ja-JP" altLang="en-US" smtClean="0"/>
-              <a:t>2025/7/22</a:t>
+              <a:t>2025/7/23</a:t>
             </a:fld>
             <a:endParaRPr kumimoji="1" lang="ja-JP" altLang="en-US"/>
           </a:p>
@@ -2939,7 +2940,7 @@
           <a:p>
             <a:fld id="{8EA3E408-0FCD-471E-8DC4-44F3A6A02DAE}" type="datetimeFigureOut">
               <a:rPr kumimoji="1" lang="ja-JP" altLang="en-US" smtClean="0"/>
-              <a:t>2025/7/22</a:t>
+              <a:t>2025/7/23</a:t>
             </a:fld>
             <a:endParaRPr kumimoji="1" lang="ja-JP" altLang="en-US"/>
           </a:p>
@@ -3248,7 +3249,7 @@
           <a:p>
             <a:fld id="{8EA3E408-0FCD-471E-8DC4-44F3A6A02DAE}" type="datetimeFigureOut">
               <a:rPr kumimoji="1" lang="ja-JP" altLang="en-US" smtClean="0"/>
-              <a:t>2025/7/22</a:t>
+              <a:t>2025/7/23</a:t>
             </a:fld>
             <a:endParaRPr kumimoji="1" lang="ja-JP" altLang="en-US"/>
           </a:p>
@@ -3844,23 +3845,11 @@
           <a:p>
             <a:r>
               <a:rPr kumimoji="1" lang="ja-JP" altLang="en-US" dirty="0"/>
-              <a:t>ロナウド・フィッシャー、フランク・イェーツ</a:t>
+              <a:t>有限集合の要素をランダムに並び替える</a:t>
             </a:r>
             <a:endParaRPr kumimoji="1" lang="en-US" altLang="ja-JP" dirty="0"/>
           </a:p>
           <a:p>
-            <a:pPr marL="0" indent="0">
-              <a:buNone/>
-            </a:pPr>
-            <a:r>
-              <a:rPr lang="ja-JP" altLang="en-US" dirty="0"/>
-              <a:t>　によって考案されたシャッフルアルゴリズム</a:t>
-            </a:r>
-          </a:p>
-          <a:p>
-            <a:pPr marL="0" indent="0">
-              <a:buNone/>
-            </a:pPr>
             <a:endParaRPr lang="en-US" altLang="ja-JP" dirty="0"/>
           </a:p>
           <a:p>
@@ -3885,6 +3874,27 @@
             <a:r>
               <a:rPr kumimoji="1" lang="ja-JP" altLang="en-US" dirty="0"/>
               <a:t>で動作する</a:t>
+            </a:r>
+            <a:endParaRPr kumimoji="1" lang="en-US" altLang="ja-JP" dirty="0"/>
+          </a:p>
+          <a:p>
+            <a:endParaRPr kumimoji="1" lang="en-US" altLang="ja-JP" dirty="0"/>
+          </a:p>
+          <a:p>
+            <a:r>
+              <a:rPr lang="ja-JP" altLang="en-US" dirty="0"/>
+              <a:t>（理論上）生成結</a:t>
+            </a:r>
+            <a:r>
+              <a:rPr lang="ja-JP" altLang="en-US" sz="3200" dirty="0">
+                <a:latin typeface="Cica" panose="020B0409020203020207" pitchFamily="49" charset="-128"/>
+                <a:ea typeface="Cica" panose="020B0409020203020207" pitchFamily="49" charset="-128"/>
+              </a:rPr>
+              <a:t>果</a:t>
+            </a:r>
+            <a:r>
+              <a:rPr lang="ja-JP" altLang="en-US" dirty="0"/>
+              <a:t>に偏りが生じない</a:t>
             </a:r>
             <a:endParaRPr kumimoji="1" lang="en-US" altLang="ja-JP" dirty="0"/>
           </a:p>
@@ -6105,7 +6115,15 @@
                 </a:r>
                 <a:r>
                   <a:rPr kumimoji="1" lang="ja-JP" altLang="en-US" dirty="0"/>
-                  <a:t>再抽選されない ⇒ 一意性</a:t>
+                  <a:t>再抽選されない⇒要素の重複</a:t>
+                </a:r>
+                <a:r>
+                  <a:rPr lang="ja-JP" altLang="en-US" dirty="0"/>
+                  <a:t>が</a:t>
+                </a:r>
+                <a:r>
+                  <a:rPr kumimoji="1" lang="ja-JP" altLang="en-US" dirty="0"/>
+                  <a:t>無い一意の順列が生成</a:t>
                 </a:r>
                 <a:endParaRPr kumimoji="1" lang="en-US" altLang="ja-JP" dirty="0"/>
               </a:p>
@@ -6248,29 +6266,73 @@
             <a:endParaRPr kumimoji="1" lang="en-US" altLang="ja-JP" dirty="0"/>
           </a:p>
           <a:p>
-            <a:pPr marL="457200" lvl="1" indent="0">
-              <a:buNone/>
+            <a:endParaRPr lang="en-US" altLang="ja-JP" sz="800" dirty="0"/>
+          </a:p>
+          <a:p>
+            <a:pPr lvl="1">
+              <a:buFont typeface="Wingdings" panose="05000000000000000000" pitchFamily="2" charset="2"/>
+              <a:buChar char="Ø"/>
             </a:pPr>
             <a:r>
-              <a:rPr kumimoji="1" lang="ja-JP" altLang="en-US" sz="2800" dirty="0">
-                <a:latin typeface="Cica" panose="020B0409020203020207" pitchFamily="49" charset="-128"/>
-                <a:ea typeface="Cica" panose="020B0409020203020207" pitchFamily="49" charset="-128"/>
-              </a:rPr>
-              <a:t>疑</a:t>
-            </a:r>
-            <a:r>
-              <a:rPr kumimoji="1" lang="ja-JP" altLang="en-US" dirty="0"/>
-              <a:t>似乱数の</a:t>
-            </a:r>
-            <a:r>
-              <a:rPr kumimoji="1" lang="ja-JP" altLang="en-US"/>
-              <a:t>おはなし↓</a:t>
-            </a:r>
-            <a:r>
-              <a:rPr lang="ja-JP" altLang="en-US"/>
-              <a:t> ↓ ↓</a:t>
-            </a:r>
-            <a:endParaRPr kumimoji="1" lang="ja-JP" altLang="en-US" dirty="0"/>
+              <a:rPr lang="ja-JP" altLang="en-US" dirty="0"/>
+              <a:t>「ランダムで選ぶ」→ </a:t>
+            </a:r>
+            <a:r>
+              <a:rPr lang="en-US" altLang="ja-JP" dirty="0" err="1"/>
+              <a:t>random.randint</a:t>
+            </a:r>
+            <a:r>
+              <a:rPr lang="en-US" altLang="ja-JP" dirty="0"/>
+              <a:t> </a:t>
+            </a:r>
+            <a:r>
+              <a:rPr lang="ja-JP" altLang="en-US" dirty="0"/>
+              <a:t>で実装</a:t>
+            </a:r>
+            <a:endParaRPr lang="en-US" altLang="ja-JP" dirty="0"/>
+          </a:p>
+          <a:p>
+            <a:pPr lvl="1">
+              <a:buFont typeface="Wingdings" panose="05000000000000000000" pitchFamily="2" charset="2"/>
+              <a:buChar char="Ø"/>
+            </a:pPr>
+            <a:endParaRPr lang="en-US" altLang="ja-JP" sz="800" dirty="0"/>
+          </a:p>
+          <a:p>
+            <a:pPr lvl="1">
+              <a:buFont typeface="Wingdings" panose="05000000000000000000" pitchFamily="2" charset="2"/>
+              <a:buChar char="Ø"/>
+            </a:pPr>
+            <a:r>
+              <a:rPr lang="ja-JP" altLang="en-US" dirty="0"/>
+              <a:t> 真の乱数を用いなければ、等確率には選べない</a:t>
+            </a:r>
+            <a:endParaRPr lang="en-US" altLang="ja-JP" dirty="0"/>
+          </a:p>
+          <a:p>
+            <a:pPr lvl="1">
+              <a:buFont typeface="Wingdings" panose="05000000000000000000" pitchFamily="2" charset="2"/>
+              <a:buChar char="Ø"/>
+            </a:pPr>
+            <a:endParaRPr lang="en-US" altLang="ja-JP" sz="800" dirty="0"/>
+          </a:p>
+          <a:p>
+            <a:pPr lvl="1">
+              <a:buFont typeface="Wingdings" panose="05000000000000000000" pitchFamily="2" charset="2"/>
+              <a:buChar char="Ø"/>
+            </a:pPr>
+            <a:r>
+              <a:rPr lang="ja-JP" altLang="en-US" dirty="0"/>
+              <a:t> 乱数生成器がメルセンヌツイスタの場合、シード値に依存する</a:t>
+            </a:r>
+            <a:endParaRPr lang="en-US" altLang="ja-JP" dirty="0"/>
+          </a:p>
+          <a:p>
+            <a:pPr lvl="1">
+              <a:buFont typeface="Wingdings" panose="05000000000000000000" pitchFamily="2" charset="2"/>
+              <a:buChar char="Ø"/>
+            </a:pPr>
+            <a:endParaRPr kumimoji="1" lang="en-US" altLang="ja-JP" sz="1000" dirty="0"/>
           </a:p>
         </p:txBody>
       </p:sp>
@@ -6278,6 +6340,148 @@
     <p:extLst>
       <p:ext uri="{BB962C8B-B14F-4D97-AF65-F5344CB8AC3E}">
         <p14:creationId xmlns:p14="http://schemas.microsoft.com/office/powerpoint/2010/main" val="1440237636"/>
+      </p:ext>
+    </p:extLst>
+  </p:cSld>
+  <p:clrMapOvr>
+    <a:masterClrMapping/>
+  </p:clrMapOvr>
+</p:sld>
+</file>
+
+<file path=ppt/slides/slide7.xml><?xml version="1.0" encoding="utf-8"?>
+<p:sld xmlns:a="http://schemas.openxmlformats.org/drawingml/2006/main" xmlns:r="http://schemas.openxmlformats.org/officeDocument/2006/relationships" xmlns:p="http://schemas.openxmlformats.org/presentationml/2006/main">
+  <p:cSld>
+    <p:spTree>
+      <p:nvGrpSpPr>
+        <p:cNvPr id="1" name=""/>
+        <p:cNvGrpSpPr/>
+        <p:nvPr/>
+      </p:nvGrpSpPr>
+      <p:grpSpPr>
+        <a:xfrm>
+          <a:off x="0" y="0"/>
+          <a:ext cx="0" cy="0"/>
+          <a:chOff x="0" y="0"/>
+          <a:chExt cx="0" cy="0"/>
+        </a:xfrm>
+      </p:grpSpPr>
+      <p:sp>
+        <p:nvSpPr>
+          <p:cNvPr id="2" name="タイトル 1">
+            <a:extLst>
+              <a:ext uri="{FF2B5EF4-FFF2-40B4-BE49-F238E27FC236}">
+                <a16:creationId xmlns:a16="http://schemas.microsoft.com/office/drawing/2014/main" id="{EBA002A6-93E7-5707-F5A3-EA36AA78C619}"/>
+              </a:ext>
+            </a:extLst>
+          </p:cNvPr>
+          <p:cNvSpPr>
+            <a:spLocks noGrp="1"/>
+          </p:cNvSpPr>
+          <p:nvPr>
+            <p:ph type="title"/>
+          </p:nvPr>
+        </p:nvSpPr>
+        <p:spPr/>
+        <p:txBody>
+          <a:bodyPr/>
+          <a:lstStyle/>
+          <a:p>
+            <a:r>
+              <a:rPr kumimoji="1" lang="ja-JP" altLang="en-US" dirty="0"/>
+              <a:t>用途</a:t>
+            </a:r>
+          </a:p>
+        </p:txBody>
+      </p:sp>
+      <p:sp>
+        <p:nvSpPr>
+          <p:cNvPr id="3" name="コンテンツ プレースホルダー 2">
+            <a:extLst>
+              <a:ext uri="{FF2B5EF4-FFF2-40B4-BE49-F238E27FC236}">
+                <a16:creationId xmlns:a16="http://schemas.microsoft.com/office/drawing/2014/main" id="{26438CB9-FD06-324F-7A64-4B8E74017133}"/>
+              </a:ext>
+            </a:extLst>
+          </p:cNvPr>
+          <p:cNvSpPr>
+            <a:spLocks noGrp="1"/>
+          </p:cNvSpPr>
+          <p:nvPr>
+            <p:ph idx="1"/>
+          </p:nvPr>
+        </p:nvSpPr>
+        <p:spPr/>
+        <p:txBody>
+          <a:bodyPr/>
+          <a:lstStyle/>
+          <a:p>
+            <a:pPr marL="0" indent="0">
+              <a:buNone/>
+            </a:pPr>
+            <a:r>
+              <a:rPr lang="ja-JP" altLang="en-US" dirty="0"/>
+              <a:t>〇 配列やリストなどの要素を、偏りなく</a:t>
+            </a:r>
+            <a:endParaRPr lang="en-US" altLang="ja-JP" dirty="0"/>
+          </a:p>
+          <a:p>
+            <a:pPr marL="0" indent="0">
+              <a:buNone/>
+            </a:pPr>
+            <a:r>
+              <a:rPr lang="ja-JP" altLang="en-US" dirty="0"/>
+              <a:t> 　ランダムな順序に並び替える</a:t>
+            </a:r>
+            <a:endParaRPr lang="en-US" altLang="ja-JP" dirty="0"/>
+          </a:p>
+          <a:p>
+            <a:pPr marL="0" indent="0">
+              <a:buNone/>
+            </a:pPr>
+            <a:endParaRPr lang="en-US" altLang="ja-JP" sz="800" dirty="0"/>
+          </a:p>
+          <a:p>
+            <a:pPr lvl="1"/>
+            <a:r>
+              <a:rPr lang="ja-JP" altLang="en-US" dirty="0"/>
+              <a:t>カードゲームのシャッフル</a:t>
+            </a:r>
+            <a:endParaRPr lang="en-US" altLang="ja-JP" dirty="0"/>
+          </a:p>
+          <a:p>
+            <a:pPr lvl="1"/>
+            <a:endParaRPr lang="en-US" altLang="ja-JP" sz="800" dirty="0"/>
+          </a:p>
+          <a:p>
+            <a:pPr lvl="1"/>
+            <a:r>
+              <a:rPr kumimoji="1" lang="ja-JP" altLang="en-US" dirty="0"/>
+              <a:t>シャッフル再生</a:t>
+            </a:r>
+            <a:endParaRPr kumimoji="1" lang="en-US" altLang="ja-JP" dirty="0"/>
+          </a:p>
+          <a:p>
+            <a:pPr lvl="1"/>
+            <a:endParaRPr kumimoji="1" lang="en-US" altLang="ja-JP" sz="800" dirty="0"/>
+          </a:p>
+          <a:p>
+            <a:pPr lvl="1"/>
+            <a:r>
+              <a:rPr kumimoji="1" lang="ja-JP" altLang="en-US" dirty="0"/>
+              <a:t>ランダムサンプリング</a:t>
+            </a:r>
+            <a:endParaRPr kumimoji="1" lang="en-US" altLang="ja-JP" dirty="0"/>
+          </a:p>
+          <a:p>
+            <a:pPr lvl="1"/>
+            <a:endParaRPr kumimoji="1" lang="ja-JP" altLang="en-US" dirty="0"/>
+          </a:p>
+        </p:txBody>
+      </p:sp>
+    </p:spTree>
+    <p:extLst>
+      <p:ext uri="{BB962C8B-B14F-4D97-AF65-F5344CB8AC3E}">
+        <p14:creationId xmlns:p14="http://schemas.microsoft.com/office/powerpoint/2010/main" val="553003385"/>
       </p:ext>
     </p:extLst>
   </p:cSld>
